--- a/.lessons/21 Fundamental CRUD/8 Updating Specific Row with eloquent (Part -1)/1.pptx
+++ b/.lessons/21 Fundamental CRUD/8 Updating Specific Row with eloquent (Part -1)/1.pptx
@@ -8,7 +8,12 @@
     <p:sldId id="401" r:id="rId2"/>
     <p:sldId id="402" r:id="rId3"/>
     <p:sldId id="403" r:id="rId4"/>
-    <p:sldId id="400" r:id="rId5"/>
+    <p:sldId id="404" r:id="rId5"/>
+    <p:sldId id="405" r:id="rId6"/>
+    <p:sldId id="406" r:id="rId7"/>
+    <p:sldId id="408" r:id="rId8"/>
+    <p:sldId id="400" r:id="rId9"/>
+    <p:sldId id="407" r:id="rId10"/>
   </p:sldIdLst>
   <p:sldSz cx="12192000" cy="6858000"/>
   <p:notesSz cx="6858000" cy="9144000"/>
@@ -262,7 +267,7 @@
           <a:p>
             <a:fld id="{3E102D2E-813C-461C-9963-687A650C48C0}" type="datetimeFigureOut">
               <a:rPr lang="en-US" smtClean="0"/>
-              <a:t>4/26/2025</a:t>
+              <a:t>5/18/2025</a:t>
             </a:fld>
             <a:endParaRPr lang="en-US"/>
           </a:p>
@@ -460,7 +465,7 @@
           <a:p>
             <a:fld id="{3E102D2E-813C-461C-9963-687A650C48C0}" type="datetimeFigureOut">
               <a:rPr lang="en-US" smtClean="0"/>
-              <a:t>4/26/2025</a:t>
+              <a:t>5/18/2025</a:t>
             </a:fld>
             <a:endParaRPr lang="en-US"/>
           </a:p>
@@ -668,7 +673,7 @@
           <a:p>
             <a:fld id="{3E102D2E-813C-461C-9963-687A650C48C0}" type="datetimeFigureOut">
               <a:rPr lang="en-US" smtClean="0"/>
-              <a:t>4/26/2025</a:t>
+              <a:t>5/18/2025</a:t>
             </a:fld>
             <a:endParaRPr lang="en-US"/>
           </a:p>
@@ -866,7 +871,7 @@
           <a:p>
             <a:fld id="{3E102D2E-813C-461C-9963-687A650C48C0}" type="datetimeFigureOut">
               <a:rPr lang="en-US" smtClean="0"/>
-              <a:t>4/26/2025</a:t>
+              <a:t>5/18/2025</a:t>
             </a:fld>
             <a:endParaRPr lang="en-US"/>
           </a:p>
@@ -1141,7 +1146,7 @@
           <a:p>
             <a:fld id="{3E102D2E-813C-461C-9963-687A650C48C0}" type="datetimeFigureOut">
               <a:rPr lang="en-US" smtClean="0"/>
-              <a:t>4/26/2025</a:t>
+              <a:t>5/18/2025</a:t>
             </a:fld>
             <a:endParaRPr lang="en-US"/>
           </a:p>
@@ -1406,7 +1411,7 @@
           <a:p>
             <a:fld id="{3E102D2E-813C-461C-9963-687A650C48C0}" type="datetimeFigureOut">
               <a:rPr lang="en-US" smtClean="0"/>
-              <a:t>4/26/2025</a:t>
+              <a:t>5/18/2025</a:t>
             </a:fld>
             <a:endParaRPr lang="en-US"/>
           </a:p>
@@ -1818,7 +1823,7 @@
           <a:p>
             <a:fld id="{3E102D2E-813C-461C-9963-687A650C48C0}" type="datetimeFigureOut">
               <a:rPr lang="en-US" smtClean="0"/>
-              <a:t>4/26/2025</a:t>
+              <a:t>5/18/2025</a:t>
             </a:fld>
             <a:endParaRPr lang="en-US"/>
           </a:p>
@@ -1959,7 +1964,7 @@
           <a:p>
             <a:fld id="{3E102D2E-813C-461C-9963-687A650C48C0}" type="datetimeFigureOut">
               <a:rPr lang="en-US" smtClean="0"/>
-              <a:t>4/26/2025</a:t>
+              <a:t>5/18/2025</a:t>
             </a:fld>
             <a:endParaRPr lang="en-US"/>
           </a:p>
@@ -2072,7 +2077,7 @@
           <a:p>
             <a:fld id="{3E102D2E-813C-461C-9963-687A650C48C0}" type="datetimeFigureOut">
               <a:rPr lang="en-US" smtClean="0"/>
-              <a:t>4/26/2025</a:t>
+              <a:t>5/18/2025</a:t>
             </a:fld>
             <a:endParaRPr lang="en-US"/>
           </a:p>
@@ -2383,7 +2388,7 @@
           <a:p>
             <a:fld id="{3E102D2E-813C-461C-9963-687A650C48C0}" type="datetimeFigureOut">
               <a:rPr lang="en-US" smtClean="0"/>
-              <a:t>4/26/2025</a:t>
+              <a:t>5/18/2025</a:t>
             </a:fld>
             <a:endParaRPr lang="en-US"/>
           </a:p>
@@ -2671,7 +2676,7 @@
           <a:p>
             <a:fld id="{3E102D2E-813C-461C-9963-687A650C48C0}" type="datetimeFigureOut">
               <a:rPr lang="en-US" smtClean="0"/>
-              <a:t>4/26/2025</a:t>
+              <a:t>5/18/2025</a:t>
             </a:fld>
             <a:endParaRPr lang="en-US"/>
           </a:p>
@@ -2912,7 +2917,7 @@
           <a:p>
             <a:fld id="{3E102D2E-813C-461C-9963-687A650C48C0}" type="datetimeFigureOut">
               <a:rPr lang="en-US" smtClean="0"/>
-              <a:t>4/26/2025</a:t>
+              <a:t>5/18/2025</a:t>
             </a:fld>
             <a:endParaRPr lang="en-US"/>
           </a:p>
@@ -3350,7 +3355,7 @@
         <p:spPr>
           <a:xfrm>
             <a:off x="217714" y="255046"/>
-            <a:ext cx="11756571" cy="355354"/>
+            <a:ext cx="11756571" cy="2756011"/>
           </a:xfrm>
           <a:prstGeom prst="rect">
             <a:avLst/>
@@ -3370,21 +3375,466 @@
               <a:buNone/>
             </a:pPr>
             <a:r>
-              <a:rPr kumimoji="0" lang="en-US" altLang="en-US" sz="1300" b="0" i="0" u="none" strike="noStrike" cap="none" normalizeH="0" baseline="0">
-                <a:ln>
-                  <a:noFill/>
-                </a:ln>
-                <a:solidFill>
-                  <a:schemeClr val="tx1"/>
-                </a:solidFill>
-                <a:effectLst/>
-                <a:latin typeface="Arial" panose="020B0604020202020204" pitchFamily="34" charset="0"/>
-              </a:rPr>
-              <a:t>.</a:t>
-            </a:r>
+              <a:rPr lang="az-Latn-AZ" altLang="en-US" sz="1300">
+                <a:latin typeface="Arial" panose="020B0604020202020204" pitchFamily="34" charset="0"/>
+              </a:rPr>
+              <a:t>İndi </a:t>
+            </a:r>
+            <a:r>
+              <a:rPr lang="az-Latn-AZ" altLang="en-US" sz="1300" b="1">
+                <a:latin typeface="Arial" panose="020B0604020202020204" pitchFamily="34" charset="0"/>
+              </a:rPr>
+              <a:t>EDİT</a:t>
+            </a:r>
+            <a:r>
+              <a:rPr lang="az-Latn-AZ" altLang="en-US" sz="1300">
+                <a:latin typeface="Arial" panose="020B0604020202020204" pitchFamily="34" charset="0"/>
+              </a:rPr>
+              <a:t> səhifəsini konfiqurasiya edirik.</a:t>
+            </a:r>
+          </a:p>
+          <a:p>
+            <a:pPr>
+              <a:lnSpc>
+                <a:spcPct val="150000"/>
+              </a:lnSpc>
+              <a:buNone/>
+            </a:pPr>
+            <a:endParaRPr lang="az-Latn-AZ" altLang="en-US" sz="1300">
+              <a:latin typeface="Arial" panose="020B0604020202020204" pitchFamily="34" charset="0"/>
+            </a:endParaRPr>
+          </a:p>
+          <a:p>
+            <a:pPr>
+              <a:lnSpc>
+                <a:spcPct val="150000"/>
+              </a:lnSpc>
+              <a:buNone/>
+            </a:pPr>
+            <a:r>
+              <a:rPr lang="az-Latn-AZ" altLang="en-US" sz="1300" b="1">
+                <a:latin typeface="Arial" panose="020B0604020202020204" pitchFamily="34" charset="0"/>
+              </a:rPr>
+              <a:t>Edit</a:t>
+            </a:r>
+            <a:r>
+              <a:rPr lang="az-Latn-AZ" altLang="en-US" sz="1300">
+                <a:latin typeface="Arial" panose="020B0604020202020204" pitchFamily="34" charset="0"/>
+              </a:rPr>
+              <a:t> düyməsi basıldıqda </a:t>
+            </a:r>
+            <a:r>
+              <a:rPr lang="az-Latn-AZ" altLang="en-US" sz="1300" b="1">
+                <a:latin typeface="Arial" panose="020B0604020202020204" pitchFamily="34" charset="0"/>
+              </a:rPr>
+              <a:t>route</a:t>
+            </a:r>
+            <a:r>
+              <a:rPr lang="en-US" altLang="en-US" sz="1300" b="1">
+                <a:latin typeface="Arial" panose="020B0604020202020204" pitchFamily="34" charset="0"/>
+              </a:rPr>
+              <a:t>()</a:t>
+            </a:r>
+            <a:r>
+              <a:rPr lang="az-Latn-AZ" altLang="en-US" sz="1300" b="1">
+                <a:latin typeface="Arial" panose="020B0604020202020204" pitchFamily="34" charset="0"/>
+              </a:rPr>
+              <a:t> </a:t>
+            </a:r>
+            <a:r>
+              <a:rPr lang="en-US" altLang="en-US" sz="1300">
+                <a:latin typeface="Arial" panose="020B0604020202020204" pitchFamily="34" charset="0"/>
+              </a:rPr>
+              <a:t>funksiyas</a:t>
+            </a:r>
+            <a:r>
+              <a:rPr lang="az-Latn-AZ" altLang="en-US" sz="1300">
+                <a:latin typeface="Arial" panose="020B0604020202020204" pitchFamily="34" charset="0"/>
+              </a:rPr>
+              <a:t>ı, </a:t>
+            </a:r>
+            <a:r>
+              <a:rPr lang="az-Latn-AZ" altLang="en-US" sz="1300" b="1">
+                <a:solidFill>
+                  <a:srgbClr val="00B050"/>
+                </a:solidFill>
+                <a:latin typeface="Arial" panose="020B0604020202020204" pitchFamily="34" charset="0"/>
+              </a:rPr>
+              <a:t>posts</a:t>
+            </a:r>
+            <a:r>
+              <a:rPr lang="en-US" altLang="en-US" sz="1300" b="1">
+                <a:solidFill>
+                  <a:srgbClr val="00B050"/>
+                </a:solidFill>
+                <a:latin typeface="Arial" panose="020B0604020202020204" pitchFamily="34" charset="0"/>
+              </a:rPr>
+              <a:t>/{post}/edit </a:t>
+            </a:r>
+            <a:r>
+              <a:rPr lang="en-US" altLang="en-US" sz="1300">
+                <a:latin typeface="Arial" panose="020B0604020202020204" pitchFamily="34" charset="0"/>
+              </a:rPr>
+              <a:t>URL -sini</a:t>
+            </a:r>
+            <a:r>
+              <a:rPr lang="az-Latn-AZ" altLang="en-US" sz="1300">
+                <a:latin typeface="Arial" panose="020B0604020202020204" pitchFamily="34" charset="0"/>
+              </a:rPr>
+              <a:t> `</a:t>
+            </a:r>
+            <a:r>
+              <a:rPr lang="az-Latn-AZ" altLang="en-US" sz="1300" b="1">
+                <a:solidFill>
+                  <a:srgbClr val="0070C0"/>
+                </a:solidFill>
+                <a:latin typeface="Arial" panose="020B0604020202020204" pitchFamily="34" charset="0"/>
+              </a:rPr>
+              <a:t>posts.edit</a:t>
+            </a:r>
+            <a:r>
+              <a:rPr lang="az-Latn-AZ" altLang="en-US" sz="1300">
+                <a:latin typeface="Arial" panose="020B0604020202020204" pitchFamily="34" charset="0"/>
+              </a:rPr>
+              <a:t>` </a:t>
+            </a:r>
+            <a:r>
+              <a:rPr lang="az-Latn-AZ" altLang="en-US" sz="1300" b="1">
+                <a:latin typeface="Arial" panose="020B0604020202020204" pitchFamily="34" charset="0"/>
+              </a:rPr>
+              <a:t>name</a:t>
+            </a:r>
+            <a:r>
+              <a:rPr lang="az-Latn-AZ" altLang="en-US" sz="1300">
+                <a:latin typeface="Arial" panose="020B0604020202020204" pitchFamily="34" charset="0"/>
+              </a:rPr>
+              <a:t> -i ilə çağırır və </a:t>
+            </a:r>
+            <a:r>
+              <a:rPr lang="az-Latn-AZ" altLang="en-US" sz="1300" b="1">
+                <a:latin typeface="Arial" panose="020B0604020202020204" pitchFamily="34" charset="0"/>
+              </a:rPr>
+              <a:t>route</a:t>
+            </a:r>
+            <a:r>
+              <a:rPr lang="en-US" altLang="en-US" sz="1300" b="1">
+                <a:latin typeface="Arial" panose="020B0604020202020204" pitchFamily="34" charset="0"/>
+              </a:rPr>
+              <a:t>()</a:t>
+            </a:r>
+            <a:r>
+              <a:rPr lang="az-Latn-AZ" altLang="en-US" sz="1300" b="1">
+                <a:latin typeface="Arial" panose="020B0604020202020204" pitchFamily="34" charset="0"/>
+              </a:rPr>
+              <a:t> </a:t>
+            </a:r>
+            <a:r>
+              <a:rPr lang="en-US" altLang="en-US" sz="1300">
+                <a:latin typeface="Arial" panose="020B0604020202020204" pitchFamily="34" charset="0"/>
+              </a:rPr>
+              <a:t>funksiyas</a:t>
+            </a:r>
+            <a:r>
+              <a:rPr lang="az-Latn-AZ" altLang="en-US" sz="1300">
+                <a:latin typeface="Arial" panose="020B0604020202020204" pitchFamily="34" charset="0"/>
+              </a:rPr>
+              <a:t>ının </a:t>
+            </a:r>
+            <a:r>
+              <a:rPr lang="az-Latn-AZ" altLang="en-US" sz="1300" b="1">
+                <a:latin typeface="Arial" panose="020B0604020202020204" pitchFamily="34" charset="0"/>
+              </a:rPr>
+              <a:t>2ci </a:t>
+            </a:r>
+            <a:r>
+              <a:rPr lang="az-Latn-AZ" altLang="en-US" sz="1300">
+                <a:latin typeface="Arial" panose="020B0604020202020204" pitchFamily="34" charset="0"/>
+              </a:rPr>
+              <a:t>parametrində yazılan </a:t>
+            </a:r>
+            <a:r>
+              <a:rPr lang="en-US" altLang="en-US" sz="1300" b="1">
+                <a:latin typeface="Arial" panose="020B0604020202020204" pitchFamily="34" charset="0"/>
+              </a:rPr>
+              <a:t>`$post-&gt;id</a:t>
+            </a:r>
+            <a:r>
+              <a:rPr lang="en-US" altLang="en-US" sz="1300">
+                <a:latin typeface="Arial" panose="020B0604020202020204" pitchFamily="34" charset="0"/>
+              </a:rPr>
+              <a:t>`</a:t>
+            </a:r>
+            <a:r>
+              <a:rPr lang="az-Latn-AZ" altLang="en-US" sz="1300">
+                <a:latin typeface="Arial" panose="020B0604020202020204" pitchFamily="34" charset="0"/>
+              </a:rPr>
+              <a:t>,</a:t>
+            </a:r>
+            <a:r>
+              <a:rPr lang="en-US" altLang="en-US" sz="1300">
+                <a:latin typeface="Arial" panose="020B0604020202020204" pitchFamily="34" charset="0"/>
+              </a:rPr>
+              <a:t> </a:t>
+            </a:r>
+            <a:r>
+              <a:rPr lang="az-Latn-AZ" altLang="en-US" sz="1300">
+                <a:latin typeface="Arial" panose="020B0604020202020204" pitchFamily="34" charset="0"/>
+              </a:rPr>
+              <a:t>həmin </a:t>
+            </a:r>
+            <a:r>
+              <a:rPr lang="az-Latn-AZ" altLang="en-US" sz="1300" b="1">
+                <a:latin typeface="Arial" panose="020B0604020202020204" pitchFamily="34" charset="0"/>
+              </a:rPr>
+              <a:t>URL</a:t>
+            </a:r>
+            <a:r>
+              <a:rPr lang="az-Latn-AZ" altLang="en-US" sz="1300">
+                <a:latin typeface="Arial" panose="020B0604020202020204" pitchFamily="34" charset="0"/>
+              </a:rPr>
+              <a:t>-nin </a:t>
+            </a:r>
+            <a:r>
+              <a:rPr lang="en-US" altLang="en-US" sz="1300" b="1">
+                <a:latin typeface="Arial" panose="020B0604020202020204" pitchFamily="34" charset="0"/>
+              </a:rPr>
+              <a:t>{post} </a:t>
+            </a:r>
+            <a:r>
+              <a:rPr lang="az-Latn-AZ" altLang="en-US" sz="1300">
+                <a:latin typeface="Arial" panose="020B0604020202020204" pitchFamily="34" charset="0"/>
+              </a:rPr>
+              <a:t>olan hissəsinə avtomatik yerləşir: </a:t>
+            </a:r>
+            <a:r>
+              <a:rPr lang="az-Latn-AZ" altLang="en-US" sz="1300" b="1" i="1">
+                <a:latin typeface="Arial" panose="020B0604020202020204" pitchFamily="34" charset="0"/>
+              </a:rPr>
+              <a:t>posts</a:t>
+            </a:r>
+            <a:r>
+              <a:rPr lang="en-US" altLang="en-US" sz="1300" b="1" i="1">
+                <a:latin typeface="Arial" panose="020B0604020202020204" pitchFamily="34" charset="0"/>
+              </a:rPr>
+              <a:t>/</a:t>
+            </a:r>
+            <a:r>
+              <a:rPr lang="az-Latn-AZ" altLang="en-US" sz="1300" b="1" i="1">
+                <a:latin typeface="Arial" panose="020B0604020202020204" pitchFamily="34" charset="0"/>
+              </a:rPr>
+              <a:t>3</a:t>
+            </a:r>
+            <a:r>
+              <a:rPr lang="en-US" altLang="en-US" sz="1300" b="1" i="1">
+                <a:latin typeface="Arial" panose="020B0604020202020204" pitchFamily="34" charset="0"/>
+              </a:rPr>
+              <a:t>/edit </a:t>
+            </a:r>
+            <a:endParaRPr lang="az-Latn-AZ" altLang="en-US" sz="1300" b="1" i="1">
+              <a:latin typeface="Arial" panose="020B0604020202020204" pitchFamily="34" charset="0"/>
+            </a:endParaRPr>
+          </a:p>
+          <a:p>
+            <a:pPr>
+              <a:lnSpc>
+                <a:spcPct val="150000"/>
+              </a:lnSpc>
+              <a:buNone/>
+            </a:pPr>
+            <a:endParaRPr lang="az-Latn-AZ" altLang="en-US" sz="1300">
+              <a:latin typeface="Arial" panose="020B0604020202020204" pitchFamily="34" charset="0"/>
+            </a:endParaRPr>
+          </a:p>
+          <a:p>
+            <a:pPr>
+              <a:lnSpc>
+                <a:spcPct val="150000"/>
+              </a:lnSpc>
+              <a:buNone/>
+            </a:pPr>
+            <a:r>
+              <a:rPr lang="az-Latn-AZ" altLang="en-US" sz="1300">
+                <a:latin typeface="Arial" panose="020B0604020202020204" pitchFamily="34" charset="0"/>
+              </a:rPr>
+              <a:t>Beləliklə biz hər </a:t>
+            </a:r>
+            <a:r>
+              <a:rPr lang="az-Latn-AZ" altLang="en-US" sz="1300" b="1">
+                <a:latin typeface="Arial" panose="020B0604020202020204" pitchFamily="34" charset="0"/>
+              </a:rPr>
+              <a:t>postu</a:t>
+            </a:r>
+            <a:r>
+              <a:rPr lang="az-Latn-AZ" altLang="en-US" sz="1300">
+                <a:latin typeface="Arial" panose="020B0604020202020204" pitchFamily="34" charset="0"/>
+              </a:rPr>
+              <a:t> ayrıca əldə edə bacarırırq. Ancaq bunun üçün ilk öncə həmin identifikatoru </a:t>
+            </a:r>
+            <a:r>
+              <a:rPr lang="az-Latn-AZ" altLang="en-US" sz="1300" b="1">
+                <a:latin typeface="Arial" panose="020B0604020202020204" pitchFamily="34" charset="0"/>
+              </a:rPr>
+              <a:t>PostController</a:t>
+            </a:r>
+            <a:r>
+              <a:rPr lang="az-Latn-AZ" altLang="en-US" sz="1300">
+                <a:latin typeface="Arial" panose="020B0604020202020204" pitchFamily="34" charset="0"/>
+              </a:rPr>
+              <a:t> -in </a:t>
+            </a:r>
+            <a:r>
+              <a:rPr lang="az-Latn-AZ" altLang="en-US" sz="1300" b="1">
+                <a:solidFill>
+                  <a:srgbClr val="FF0000"/>
+                </a:solidFill>
+                <a:latin typeface="Arial" panose="020B0604020202020204" pitchFamily="34" charset="0"/>
+              </a:rPr>
+              <a:t>edit(</a:t>
+            </a:r>
+            <a:r>
+              <a:rPr lang="en-US" altLang="en-US" sz="1300" b="1">
+                <a:latin typeface="Arial" panose="020B0604020202020204" pitchFamily="34" charset="0"/>
+              </a:rPr>
+              <a:t>$id</a:t>
+            </a:r>
+            <a:r>
+              <a:rPr lang="az-Latn-AZ" altLang="en-US" sz="1300" b="1">
+                <a:solidFill>
+                  <a:srgbClr val="FF0000"/>
+                </a:solidFill>
+                <a:latin typeface="Arial" panose="020B0604020202020204" pitchFamily="34" charset="0"/>
+              </a:rPr>
+              <a:t>) </a:t>
+            </a:r>
+            <a:r>
+              <a:rPr lang="en-US" altLang="en-US" sz="1300">
+                <a:latin typeface="Arial" panose="020B0604020202020204" pitchFamily="34" charset="0"/>
+              </a:rPr>
+              <a:t>funksiyas</a:t>
+            </a:r>
+            <a:r>
+              <a:rPr lang="az-Latn-AZ" altLang="en-US" sz="1300">
+                <a:latin typeface="Arial" panose="020B0604020202020204" pitchFamily="34" charset="0"/>
+              </a:rPr>
+              <a:t>ına göndərmək lazımdır. Aşağı şəkildə olduğu kimi. </a:t>
+            </a:r>
+            <a:r>
+              <a:rPr lang="en-US" altLang="en-US" sz="1300" b="1">
+                <a:latin typeface="Arial" panose="020B0604020202020204" pitchFamily="34" charset="0"/>
+              </a:rPr>
+              <a:t>$id </a:t>
+            </a:r>
+            <a:r>
+              <a:rPr lang="az-Latn-AZ" altLang="en-US" sz="1300">
+                <a:latin typeface="Arial" panose="020B0604020202020204" pitchFamily="34" charset="0"/>
+              </a:rPr>
+              <a:t>parametri bu identifikatoru əldə edir və </a:t>
+            </a:r>
+            <a:r>
+              <a:rPr lang="az-Latn-AZ" altLang="en-US" sz="1300" b="1">
+                <a:latin typeface="Arial" panose="020B0604020202020204" pitchFamily="34" charset="0"/>
+              </a:rPr>
+              <a:t>POST</a:t>
+            </a:r>
+            <a:r>
+              <a:rPr lang="az-Latn-AZ" altLang="en-US" sz="1300">
+                <a:latin typeface="Arial" panose="020B0604020202020204" pitchFamily="34" charset="0"/>
+              </a:rPr>
+              <a:t> modelində </a:t>
+            </a:r>
+            <a:r>
+              <a:rPr lang="az-Latn-AZ" altLang="en-US" sz="1300" b="1">
+                <a:solidFill>
+                  <a:srgbClr val="FF0000"/>
+                </a:solidFill>
+                <a:latin typeface="Arial" panose="020B0604020202020204" pitchFamily="34" charset="0"/>
+              </a:rPr>
+              <a:t>findOrFail() </a:t>
+            </a:r>
+            <a:r>
+              <a:rPr lang="az-Latn-AZ" altLang="en-US" sz="1300">
+                <a:latin typeface="Arial" panose="020B0604020202020204" pitchFamily="34" charset="0"/>
+              </a:rPr>
+              <a:t>funksiyası ilə </a:t>
+            </a:r>
+            <a:r>
+              <a:rPr lang="az-Latn-AZ" altLang="en-US" sz="1300" b="1">
+                <a:latin typeface="Arial" panose="020B0604020202020204" pitchFamily="34" charset="0"/>
+              </a:rPr>
+              <a:t>postu</a:t>
+            </a:r>
+            <a:r>
+              <a:rPr lang="az-Latn-AZ" altLang="en-US" sz="1300">
+                <a:latin typeface="Arial" panose="020B0604020202020204" pitchFamily="34" charset="0"/>
+              </a:rPr>
+              <a:t> çağıraraq </a:t>
+            </a:r>
+            <a:r>
+              <a:rPr lang="az-Latn-AZ" altLang="en-US" sz="1300" b="1">
+                <a:latin typeface="Arial" panose="020B0604020202020204" pitchFamily="34" charset="0"/>
+              </a:rPr>
+              <a:t>şablona</a:t>
+            </a:r>
+            <a:r>
+              <a:rPr lang="az-Latn-AZ" altLang="en-US" sz="1300">
+                <a:latin typeface="Arial" panose="020B0604020202020204" pitchFamily="34" charset="0"/>
+              </a:rPr>
+              <a:t> göndəririk.</a:t>
+            </a:r>
+            <a:br>
+              <a:rPr lang="en-US" altLang="en-US" sz="1300">
+                <a:latin typeface="Arial" panose="020B0604020202020204" pitchFamily="34" charset="0"/>
+              </a:rPr>
+            </a:br>
+            <a:endParaRPr kumimoji="0" lang="en-US" altLang="en-US" sz="1300" b="0" i="0" u="none" strike="noStrike" cap="none" normalizeH="0" baseline="0">
+              <a:ln>
+                <a:noFill/>
+              </a:ln>
+              <a:solidFill>
+                <a:schemeClr val="tx1"/>
+              </a:solidFill>
+              <a:effectLst/>
+              <a:latin typeface="Arial" panose="020B0604020202020204" pitchFamily="34" charset="0"/>
+            </a:endParaRPr>
           </a:p>
         </p:txBody>
       </p:sp>
+      <p:pic>
+        <p:nvPicPr>
+          <p:cNvPr id="4" name="Picture 3">
+            <a:extLst>
+              <a:ext uri="{FF2B5EF4-FFF2-40B4-BE49-F238E27FC236}">
+                <a16:creationId xmlns:a16="http://schemas.microsoft.com/office/drawing/2014/main" id="{2C2E7983-4617-5C5D-1AF8-88671DD24A26}"/>
+              </a:ext>
+            </a:extLst>
+          </p:cNvPr>
+          <p:cNvPicPr>
+            <a:picLocks noChangeAspect="1"/>
+          </p:cNvPicPr>
+          <p:nvPr/>
+        </p:nvPicPr>
+        <p:blipFill>
+          <a:blip r:embed="rId2">
+            <a:extLst>
+              <a:ext uri="{28A0092B-C50C-407E-A947-70E740481C1C}">
+                <a14:useLocalDpi xmlns:a14="http://schemas.microsoft.com/office/drawing/2010/main" val="0"/>
+              </a:ext>
+            </a:extLst>
+          </a:blip>
+          <a:stretch>
+            <a:fillRect/>
+          </a:stretch>
+        </p:blipFill>
+        <p:spPr>
+          <a:xfrm>
+            <a:off x="4914900" y="2558941"/>
+            <a:ext cx="7277100" cy="4299059"/>
+          </a:xfrm>
+          <a:prstGeom prst="rect">
+            <a:avLst/>
+          </a:prstGeom>
+        </p:spPr>
+      </p:pic>
     </p:spTree>
     <p:extLst>
       <p:ext uri="{BB962C8B-B14F-4D97-AF65-F5344CB8AC3E}">
@@ -3436,7 +3886,7 @@
         <p:spPr>
           <a:xfrm>
             <a:off x="217714" y="255046"/>
-            <a:ext cx="11756571" cy="355354"/>
+            <a:ext cx="11756571" cy="4256422"/>
           </a:xfrm>
           <a:prstGeom prst="rect">
             <a:avLst/>
@@ -3456,6 +3906,38 @@
               <a:buNone/>
             </a:pPr>
             <a:r>
+              <a:rPr lang="az-Latn-AZ" altLang="en-US" sz="1300">
+                <a:latin typeface="Arial" panose="020B0604020202020204" pitchFamily="34" charset="0"/>
+              </a:rPr>
+              <a:t>Daha fərqli bir şəkildə izah edək əgər aydın olmadısa. </a:t>
+            </a:r>
+          </a:p>
+          <a:p>
+            <a:pPr>
+              <a:lnSpc>
+                <a:spcPct val="150000"/>
+              </a:lnSpc>
+              <a:buNone/>
+            </a:pPr>
+            <a:endParaRPr kumimoji="0" lang="az-Latn-AZ" altLang="en-US" sz="1300" b="0" i="0" u="none" strike="noStrike" cap="none" normalizeH="0" baseline="0">
+              <a:ln>
+                <a:noFill/>
+              </a:ln>
+              <a:solidFill>
+                <a:schemeClr val="tx1"/>
+              </a:solidFill>
+              <a:effectLst/>
+              <a:latin typeface="Arial" panose="020B0604020202020204" pitchFamily="34" charset="0"/>
+            </a:endParaRPr>
+          </a:p>
+          <a:p>
+            <a:pPr>
+              <a:lnSpc>
+                <a:spcPct val="150000"/>
+              </a:lnSpc>
+              <a:buNone/>
+            </a:pPr>
+            <a:r>
               <a:rPr kumimoji="0" lang="en-US" altLang="en-US" sz="1300" b="0" i="0" u="none" strike="noStrike" cap="none" normalizeH="0" baseline="0">
                 <a:ln>
                   <a:noFill/>
@@ -3466,11 +3948,487 @@
                 <a:effectLst/>
                 <a:latin typeface="Arial" panose="020B0604020202020204" pitchFamily="34" charset="0"/>
               </a:rPr>
-              <a:t>.</a:t>
-            </a:r>
+              <a:t>1) Route və Edit Linki:</a:t>
+            </a:r>
+            <a:r>
+              <a:rPr kumimoji="0" lang="az-Latn-AZ" altLang="en-US" sz="1300" b="0" i="0" u="none" strike="noStrike" cap="none" normalizeH="0" baseline="0">
+                <a:ln>
+                  <a:noFill/>
+                </a:ln>
+                <a:solidFill>
+                  <a:schemeClr val="tx1"/>
+                </a:solidFill>
+                <a:effectLst/>
+                <a:latin typeface="Arial" panose="020B0604020202020204" pitchFamily="34" charset="0"/>
+              </a:rPr>
+              <a:t>  </a:t>
+            </a:r>
+          </a:p>
+          <a:p>
+            <a:pPr>
+              <a:lnSpc>
+                <a:spcPct val="150000"/>
+              </a:lnSpc>
+              <a:buNone/>
+            </a:pPr>
+            <a:endParaRPr kumimoji="0" lang="az-Latn-AZ" altLang="en-US" sz="1300" b="0" i="0" u="none" strike="noStrike" cap="none" normalizeH="0" baseline="0">
+              <a:ln>
+                <a:noFill/>
+              </a:ln>
+              <a:solidFill>
+                <a:schemeClr val="tx1"/>
+              </a:solidFill>
+              <a:effectLst/>
+              <a:latin typeface="Arial" panose="020B0604020202020204" pitchFamily="34" charset="0"/>
+            </a:endParaRPr>
+          </a:p>
+          <a:p>
+            <a:pPr>
+              <a:lnSpc>
+                <a:spcPct val="150000"/>
+              </a:lnSpc>
+              <a:buNone/>
+            </a:pPr>
+            <a:endParaRPr lang="az-Latn-AZ" altLang="en-US" sz="1300">
+              <a:latin typeface="Arial" panose="020B0604020202020204" pitchFamily="34" charset="0"/>
+            </a:endParaRPr>
+          </a:p>
+          <a:p>
+            <a:pPr>
+              <a:lnSpc>
+                <a:spcPct val="150000"/>
+              </a:lnSpc>
+              <a:buNone/>
+            </a:pPr>
+            <a:endParaRPr kumimoji="0" lang="az-Latn-AZ" altLang="en-US" sz="1300" b="0" i="0" u="none" strike="noStrike" cap="none" normalizeH="0" baseline="0">
+              <a:ln>
+                <a:noFill/>
+              </a:ln>
+              <a:solidFill>
+                <a:schemeClr val="tx1"/>
+              </a:solidFill>
+              <a:effectLst/>
+              <a:latin typeface="Arial" panose="020B0604020202020204" pitchFamily="34" charset="0"/>
+            </a:endParaRPr>
+          </a:p>
+          <a:p>
+            <a:pPr>
+              <a:lnSpc>
+                <a:spcPct val="150000"/>
+              </a:lnSpc>
+              <a:buNone/>
+            </a:pPr>
+            <a:endParaRPr lang="az-Latn-AZ" altLang="en-US" sz="1300">
+              <a:latin typeface="Arial" panose="020B0604020202020204" pitchFamily="34" charset="0"/>
+            </a:endParaRPr>
+          </a:p>
+          <a:p>
+            <a:pPr>
+              <a:lnSpc>
+                <a:spcPct val="150000"/>
+              </a:lnSpc>
+              <a:buNone/>
+            </a:pPr>
+            <a:r>
+              <a:rPr kumimoji="0" lang="az-Latn-AZ" altLang="en-US" sz="1300" b="0" i="0" u="none" strike="noStrike" cap="none" normalizeH="0" baseline="0">
+                <a:ln>
+                  <a:noFill/>
+                </a:ln>
+                <a:solidFill>
+                  <a:schemeClr val="tx1"/>
+                </a:solidFill>
+                <a:effectLst/>
+                <a:latin typeface="Arial" panose="020B0604020202020204" pitchFamily="34" charset="0"/>
+              </a:rPr>
+              <a:t>Bu nədir? Bu Laravel </a:t>
+            </a:r>
+            <a:r>
+              <a:rPr kumimoji="0" lang="az-Latn-AZ" altLang="en-US" sz="1300" b="1" i="0" u="none" strike="noStrike" cap="none" normalizeH="0" baseline="0">
+                <a:ln>
+                  <a:noFill/>
+                </a:ln>
+                <a:solidFill>
+                  <a:schemeClr val="tx1"/>
+                </a:solidFill>
+                <a:effectLst/>
+                <a:latin typeface="Arial" panose="020B0604020202020204" pitchFamily="34" charset="0"/>
+              </a:rPr>
+              <a:t>routing</a:t>
+            </a:r>
+            <a:r>
+              <a:rPr kumimoji="0" lang="az-Latn-AZ" altLang="en-US" sz="1300" b="0" i="0" u="none" strike="noStrike" cap="none" normalizeH="0" baseline="0">
+                <a:ln>
+                  <a:noFill/>
+                </a:ln>
+                <a:solidFill>
+                  <a:schemeClr val="tx1"/>
+                </a:solidFill>
+                <a:effectLst/>
+                <a:latin typeface="Arial" panose="020B0604020202020204" pitchFamily="34" charset="0"/>
+              </a:rPr>
+              <a:t> sistemindəki bir qeydiyyatdır. </a:t>
+            </a:r>
+            <a:r>
+              <a:rPr kumimoji="0" lang="az-Latn-AZ" altLang="en-US" sz="1300" b="1" i="0" u="none" strike="noStrike" cap="none" normalizeH="0" baseline="0">
+                <a:ln>
+                  <a:noFill/>
+                </a:ln>
+                <a:solidFill>
+                  <a:schemeClr val="tx1"/>
+                </a:solidFill>
+                <a:effectLst/>
+                <a:latin typeface="Arial" panose="020B0604020202020204" pitchFamily="34" charset="0"/>
+              </a:rPr>
+              <a:t>routes/web.php </a:t>
+            </a:r>
+            <a:r>
+              <a:rPr kumimoji="0" lang="az-Latn-AZ" altLang="en-US" sz="1300" b="0" i="0" u="none" strike="noStrike" cap="none" normalizeH="0" baseline="0">
+                <a:ln>
+                  <a:noFill/>
+                </a:ln>
+                <a:solidFill>
+                  <a:schemeClr val="tx1"/>
+                </a:solidFill>
+                <a:effectLst/>
+                <a:latin typeface="Arial" panose="020B0604020202020204" pitchFamily="34" charset="0"/>
+              </a:rPr>
+              <a:t>faylında belə bir route təyin olunmuş olmalıdır. </a:t>
+            </a:r>
+          </a:p>
+          <a:p>
+            <a:pPr>
+              <a:lnSpc>
+                <a:spcPct val="150000"/>
+              </a:lnSpc>
+              <a:buNone/>
+            </a:pPr>
+            <a:endParaRPr lang="az-Latn-AZ" altLang="en-US" sz="1300">
+              <a:latin typeface="Arial" panose="020B0604020202020204" pitchFamily="34" charset="0"/>
+            </a:endParaRPr>
+          </a:p>
+          <a:p>
+            <a:pPr>
+              <a:lnSpc>
+                <a:spcPct val="150000"/>
+              </a:lnSpc>
+              <a:buNone/>
+            </a:pPr>
+            <a:endParaRPr kumimoji="0" lang="az-Latn-AZ" altLang="en-US" sz="1300" b="0" i="0" u="none" strike="noStrike" cap="none" normalizeH="0" baseline="0">
+              <a:ln>
+                <a:noFill/>
+              </a:ln>
+              <a:solidFill>
+                <a:schemeClr val="tx1"/>
+              </a:solidFill>
+              <a:effectLst/>
+              <a:latin typeface="Arial" panose="020B0604020202020204" pitchFamily="34" charset="0"/>
+            </a:endParaRPr>
+          </a:p>
+          <a:p>
+            <a:pPr>
+              <a:lnSpc>
+                <a:spcPct val="150000"/>
+              </a:lnSpc>
+              <a:buNone/>
+            </a:pPr>
+            <a:endParaRPr lang="az-Latn-AZ" altLang="en-US" sz="1300">
+              <a:latin typeface="Arial" panose="020B0604020202020204" pitchFamily="34" charset="0"/>
+            </a:endParaRPr>
+          </a:p>
+          <a:p>
+            <a:pPr>
+              <a:lnSpc>
+                <a:spcPct val="150000"/>
+              </a:lnSpc>
+              <a:buNone/>
+            </a:pPr>
+            <a:endParaRPr lang="az-Latn-AZ" altLang="en-US" sz="1300">
+              <a:latin typeface="Arial" panose="020B0604020202020204" pitchFamily="34" charset="0"/>
+            </a:endParaRPr>
+          </a:p>
+          <a:p>
+            <a:pPr>
+              <a:lnSpc>
+                <a:spcPct val="150000"/>
+              </a:lnSpc>
+              <a:buNone/>
+            </a:pPr>
+            <a:r>
+              <a:rPr kumimoji="0" lang="az-Latn-AZ" altLang="en-US" sz="1300" b="0" i="0" u="none" strike="noStrike" cap="none" normalizeH="0" baseline="0">
+                <a:ln>
+                  <a:noFill/>
+                </a:ln>
+                <a:solidFill>
+                  <a:schemeClr val="tx1"/>
+                </a:solidFill>
+                <a:effectLst/>
+                <a:latin typeface="Arial" panose="020B0604020202020204" pitchFamily="34" charset="0"/>
+              </a:rPr>
+              <a:t>Ancaq biz </a:t>
+            </a:r>
+            <a:r>
+              <a:rPr kumimoji="0" lang="az-Latn-AZ" altLang="en-US" sz="1300" b="1" i="0" u="none" strike="noStrike" cap="none" normalizeH="0" baseline="0">
+                <a:ln>
+                  <a:noFill/>
+                </a:ln>
+                <a:solidFill>
+                  <a:schemeClr val="tx1"/>
+                </a:solidFill>
+                <a:effectLst/>
+                <a:latin typeface="Arial" panose="020B0604020202020204" pitchFamily="34" charset="0"/>
+              </a:rPr>
+              <a:t>PostControler</a:t>
+            </a:r>
+            <a:r>
+              <a:rPr kumimoji="0" lang="az-Latn-AZ" altLang="en-US" sz="1300" b="0" i="0" u="none" strike="noStrike" cap="none" normalizeH="0" baseline="0">
+                <a:ln>
+                  <a:noFill/>
+                </a:ln>
+                <a:solidFill>
+                  <a:schemeClr val="tx1"/>
+                </a:solidFill>
+                <a:effectLst/>
+                <a:latin typeface="Arial" panose="020B0604020202020204" pitchFamily="34" charset="0"/>
+              </a:rPr>
+              <a:t> -i yaradan zaman </a:t>
+            </a:r>
+            <a:r>
+              <a:rPr kumimoji="0" lang="az-Latn-AZ" altLang="en-US" sz="1300" b="1" i="0" u="none" strike="noStrike" cap="none" normalizeH="0" baseline="0">
+                <a:ln>
+                  <a:noFill/>
+                </a:ln>
+                <a:solidFill>
+                  <a:srgbClr val="FF0000"/>
+                </a:solidFill>
+                <a:effectLst/>
+                <a:latin typeface="Arial" panose="020B0604020202020204" pitchFamily="34" charset="0"/>
+              </a:rPr>
+              <a:t>resource</a:t>
+            </a:r>
+            <a:r>
+              <a:rPr kumimoji="0" lang="az-Latn-AZ" altLang="en-US" sz="1300" b="0" i="0" u="none" strike="noStrike" cap="none" normalizeH="0" baseline="0">
+                <a:ln>
+                  <a:noFill/>
+                </a:ln>
+                <a:solidFill>
+                  <a:schemeClr val="tx1"/>
+                </a:solidFill>
+                <a:effectLst/>
+                <a:latin typeface="Arial" panose="020B0604020202020204" pitchFamily="34" charset="0"/>
+              </a:rPr>
+              <a:t> flaqından istifadə etmişdik deyə, bizdə sadəcə aşağıdakı kimi ümumi </a:t>
+            </a:r>
+            <a:r>
+              <a:rPr kumimoji="0" lang="az-Latn-AZ" altLang="en-US" sz="1300" b="1" i="0" u="none" strike="noStrike" cap="none" normalizeH="0" baseline="0">
+                <a:ln>
+                  <a:noFill/>
+                </a:ln>
+                <a:solidFill>
+                  <a:schemeClr val="tx1"/>
+                </a:solidFill>
+                <a:effectLst/>
+                <a:latin typeface="Arial" panose="020B0604020202020204" pitchFamily="34" charset="0"/>
+              </a:rPr>
+              <a:t>route</a:t>
+            </a:r>
+            <a:r>
+              <a:rPr kumimoji="0" lang="az-Latn-AZ" altLang="en-US" sz="1300" b="0" i="0" u="none" strike="noStrike" cap="none" normalizeH="0" baseline="0">
+                <a:ln>
+                  <a:noFill/>
+                </a:ln>
+                <a:solidFill>
+                  <a:schemeClr val="tx1"/>
+                </a:solidFill>
+                <a:effectLst/>
+                <a:latin typeface="Arial" panose="020B0604020202020204" pitchFamily="34" charset="0"/>
+              </a:rPr>
+              <a:t> təyin edilib. Bunun üçün terminalda </a:t>
+            </a:r>
+            <a:r>
+              <a:rPr kumimoji="0" lang="az-Latn-AZ" altLang="en-US" sz="1300" b="1" i="0" u="none" strike="noStrike" cap="none" normalizeH="0" baseline="0">
+                <a:ln>
+                  <a:noFill/>
+                </a:ln>
+                <a:solidFill>
+                  <a:schemeClr val="accent2"/>
+                </a:solidFill>
+                <a:effectLst/>
+                <a:latin typeface="Arial" panose="020B0604020202020204" pitchFamily="34" charset="0"/>
+              </a:rPr>
+              <a:t>php artisan route:list </a:t>
+            </a:r>
+            <a:r>
+              <a:rPr kumimoji="0" lang="az-Latn-AZ" altLang="en-US" sz="1300" b="0" i="0" u="none" strike="noStrike" cap="none" normalizeH="0" baseline="0">
+                <a:ln>
+                  <a:noFill/>
+                </a:ln>
+                <a:solidFill>
+                  <a:schemeClr val="tx1"/>
+                </a:solidFill>
+                <a:effectLst/>
+                <a:latin typeface="Arial" panose="020B0604020202020204" pitchFamily="34" charset="0"/>
+              </a:rPr>
+              <a:t>yazırıq ki, </a:t>
+            </a:r>
+            <a:r>
+              <a:rPr kumimoji="0" lang="az-Latn-AZ" altLang="en-US" sz="1300" b="1" i="0" u="none" strike="noStrike" cap="none" normalizeH="0" baseline="0">
+                <a:ln>
+                  <a:noFill/>
+                </a:ln>
+                <a:solidFill>
+                  <a:schemeClr val="tx1"/>
+                </a:solidFill>
+                <a:effectLst/>
+                <a:latin typeface="Arial" panose="020B0604020202020204" pitchFamily="34" charset="0"/>
+              </a:rPr>
+              <a:t>name</a:t>
+            </a:r>
+            <a:r>
+              <a:rPr kumimoji="0" lang="az-Latn-AZ" altLang="en-US" sz="1300" b="0" i="0" u="none" strike="noStrike" cap="none" normalizeH="0" baseline="0">
+                <a:ln>
+                  <a:noFill/>
+                </a:ln>
+                <a:solidFill>
+                  <a:schemeClr val="tx1"/>
+                </a:solidFill>
+                <a:effectLst/>
+                <a:latin typeface="Arial" panose="020B0604020202020204" pitchFamily="34" charset="0"/>
+              </a:rPr>
+              <a:t> və digər url adlarını və.s görə bilək.</a:t>
+            </a:r>
+            <a:endParaRPr kumimoji="0" lang="en-US" altLang="en-US" sz="1300" b="0" i="0" u="none" strike="noStrike" cap="none" normalizeH="0" baseline="0">
+              <a:ln>
+                <a:noFill/>
+              </a:ln>
+              <a:solidFill>
+                <a:schemeClr val="tx1"/>
+              </a:solidFill>
+              <a:effectLst/>
+              <a:latin typeface="Arial" panose="020B0604020202020204" pitchFamily="34" charset="0"/>
+            </a:endParaRPr>
           </a:p>
         </p:txBody>
       </p:sp>
+      <p:pic>
+        <p:nvPicPr>
+          <p:cNvPr id="4" name="Picture 3">
+            <a:extLst>
+              <a:ext uri="{FF2B5EF4-FFF2-40B4-BE49-F238E27FC236}">
+                <a16:creationId xmlns:a16="http://schemas.microsoft.com/office/drawing/2014/main" id="{7A8C8C79-8673-0E19-0BB4-26D5E97094E6}"/>
+              </a:ext>
+            </a:extLst>
+          </p:cNvPr>
+          <p:cNvPicPr>
+            <a:picLocks noChangeAspect="1"/>
+          </p:cNvPicPr>
+          <p:nvPr/>
+        </p:nvPicPr>
+        <p:blipFill>
+          <a:blip r:embed="rId2"/>
+          <a:stretch>
+            <a:fillRect/>
+          </a:stretch>
+        </p:blipFill>
+        <p:spPr>
+          <a:xfrm>
+            <a:off x="0" y="1255689"/>
+            <a:ext cx="6296904" cy="552527"/>
+          </a:xfrm>
+          <a:prstGeom prst="rect">
+            <a:avLst/>
+          </a:prstGeom>
+        </p:spPr>
+      </p:pic>
+      <p:pic>
+        <p:nvPicPr>
+          <p:cNvPr id="6" name="Picture 5">
+            <a:extLst>
+              <a:ext uri="{FF2B5EF4-FFF2-40B4-BE49-F238E27FC236}">
+                <a16:creationId xmlns:a16="http://schemas.microsoft.com/office/drawing/2014/main" id="{16BB2DAC-68D0-1B9E-37AF-1B39FB1D0C41}"/>
+              </a:ext>
+            </a:extLst>
+          </p:cNvPr>
+          <p:cNvPicPr>
+            <a:picLocks noChangeAspect="1"/>
+          </p:cNvPicPr>
+          <p:nvPr/>
+        </p:nvPicPr>
+        <p:blipFill>
+          <a:blip r:embed="rId3"/>
+          <a:stretch>
+            <a:fillRect/>
+          </a:stretch>
+        </p:blipFill>
+        <p:spPr>
+          <a:xfrm>
+            <a:off x="0" y="2688100"/>
+            <a:ext cx="7125694" cy="571580"/>
+          </a:xfrm>
+          <a:prstGeom prst="rect">
+            <a:avLst/>
+          </a:prstGeom>
+        </p:spPr>
+      </p:pic>
+      <p:pic>
+        <p:nvPicPr>
+          <p:cNvPr id="8" name="Picture 7">
+            <a:extLst>
+              <a:ext uri="{FF2B5EF4-FFF2-40B4-BE49-F238E27FC236}">
+                <a16:creationId xmlns:a16="http://schemas.microsoft.com/office/drawing/2014/main" id="{CC2A34D1-1049-0F70-D679-6781977AADDD}"/>
+              </a:ext>
+            </a:extLst>
+          </p:cNvPr>
+          <p:cNvPicPr>
+            <a:picLocks noChangeAspect="1"/>
+          </p:cNvPicPr>
+          <p:nvPr/>
+        </p:nvPicPr>
+        <p:blipFill>
+          <a:blip r:embed="rId4"/>
+          <a:stretch>
+            <a:fillRect/>
+          </a:stretch>
+        </p:blipFill>
+        <p:spPr>
+          <a:xfrm>
+            <a:off x="0" y="4578307"/>
+            <a:ext cx="4448796" cy="257211"/>
+          </a:xfrm>
+          <a:prstGeom prst="rect">
+            <a:avLst/>
+          </a:prstGeom>
+        </p:spPr>
+      </p:pic>
+      <p:pic>
+        <p:nvPicPr>
+          <p:cNvPr id="10" name="Picture 9">
+            <a:extLst>
+              <a:ext uri="{FF2B5EF4-FFF2-40B4-BE49-F238E27FC236}">
+                <a16:creationId xmlns:a16="http://schemas.microsoft.com/office/drawing/2014/main" id="{95A9D050-DD90-25F8-4CB4-DD04AE9B0A58}"/>
+              </a:ext>
+            </a:extLst>
+          </p:cNvPr>
+          <p:cNvPicPr>
+            <a:picLocks noChangeAspect="1"/>
+          </p:cNvPicPr>
+          <p:nvPr/>
+        </p:nvPicPr>
+        <p:blipFill>
+          <a:blip r:embed="rId5"/>
+          <a:stretch>
+            <a:fillRect/>
+          </a:stretch>
+        </p:blipFill>
+        <p:spPr>
+          <a:xfrm>
+            <a:off x="7984503" y="4578307"/>
+            <a:ext cx="4207497" cy="980304"/>
+          </a:xfrm>
+          <a:prstGeom prst="rect">
+            <a:avLst/>
+          </a:prstGeom>
+        </p:spPr>
+      </p:pic>
     </p:spTree>
     <p:extLst>
       <p:ext uri="{BB962C8B-B14F-4D97-AF65-F5344CB8AC3E}">
@@ -3522,7 +4480,7 @@
         <p:spPr>
           <a:xfrm>
             <a:off x="217714" y="255046"/>
-            <a:ext cx="11756571" cy="355354"/>
+            <a:ext cx="11756571" cy="4856586"/>
           </a:xfrm>
           <a:prstGeom prst="rect">
             <a:avLst/>
@@ -3552,11 +4510,749 @@
                 <a:effectLst/>
                 <a:latin typeface="Arial" panose="020B0604020202020204" pitchFamily="34" charset="0"/>
               </a:rPr>
-              <a:t>.</a:t>
+              <a:t>2) </a:t>
+            </a:r>
+            <a:r>
+              <a:rPr kumimoji="0" lang="en-US" altLang="en-US" sz="1300" b="1" i="0" u="none" strike="noStrike" cap="none" normalizeH="0" baseline="0">
+                <a:ln>
+                  <a:noFill/>
+                </a:ln>
+                <a:solidFill>
+                  <a:schemeClr val="tx1"/>
+                </a:solidFill>
+                <a:effectLst/>
+                <a:latin typeface="Arial" panose="020B0604020202020204" pitchFamily="34" charset="0"/>
+              </a:rPr>
+              <a:t>Blade şablonundakı bu hissə</a:t>
+            </a:r>
+            <a:r>
+              <a:rPr kumimoji="0" lang="az-Latn-AZ" altLang="en-US" sz="1300" b="1" i="0" u="none" strike="noStrike" cap="none" normalizeH="0" baseline="0">
+                <a:ln>
+                  <a:noFill/>
+                </a:ln>
+                <a:solidFill>
+                  <a:schemeClr val="tx1"/>
+                </a:solidFill>
+                <a:effectLst/>
+                <a:latin typeface="Arial" panose="020B0604020202020204" pitchFamily="34" charset="0"/>
+              </a:rPr>
+              <a:t> </a:t>
+            </a:r>
+            <a:r>
+              <a:rPr kumimoji="0" lang="en-US" altLang="en-US" sz="1300" b="1" i="0" u="none" strike="noStrike" cap="none" normalizeH="0" baseline="0">
+                <a:ln>
+                  <a:noFill/>
+                </a:ln>
+                <a:solidFill>
+                  <a:schemeClr val="tx1"/>
+                </a:solidFill>
+                <a:effectLst/>
+                <a:latin typeface="Arial" panose="020B0604020202020204" pitchFamily="34" charset="0"/>
+              </a:rPr>
+              <a:t>nə iş görür</a:t>
+            </a:r>
+            <a:r>
+              <a:rPr kumimoji="0" lang="az-Latn-AZ" altLang="en-US" sz="1300" b="0" i="0" u="none" strike="noStrike" cap="none" normalizeH="0" baseline="0">
+                <a:ln>
+                  <a:noFill/>
+                </a:ln>
+                <a:solidFill>
+                  <a:schemeClr val="tx1"/>
+                </a:solidFill>
+                <a:effectLst/>
+                <a:latin typeface="Arial" panose="020B0604020202020204" pitchFamily="34" charset="0"/>
+              </a:rPr>
+              <a:t>: </a:t>
+            </a:r>
+            <a:r>
+              <a:rPr kumimoji="0" lang="en-US" altLang="en-US" sz="1300" b="0" i="0" u="none" strike="noStrike" cap="none" normalizeH="0" baseline="0">
+                <a:ln>
+                  <a:noFill/>
+                </a:ln>
+                <a:solidFill>
+                  <a:schemeClr val="tx1"/>
+                </a:solidFill>
+                <a:effectLst/>
+                <a:latin typeface="Arial" panose="020B0604020202020204" pitchFamily="34" charset="0"/>
+              </a:rPr>
+              <a:t>Bu, </a:t>
+            </a:r>
+            <a:r>
+              <a:rPr kumimoji="0" lang="en-US" altLang="en-US" sz="1300" b="1" i="0" u="none" strike="noStrike" cap="none" normalizeH="0" baseline="0">
+                <a:ln>
+                  <a:noFill/>
+                </a:ln>
+                <a:solidFill>
+                  <a:schemeClr val="tx1"/>
+                </a:solidFill>
+                <a:effectLst/>
+                <a:latin typeface="Arial" panose="020B0604020202020204" pitchFamily="34" charset="0"/>
+              </a:rPr>
+              <a:t>Edit</a:t>
+            </a:r>
+            <a:r>
+              <a:rPr kumimoji="0" lang="en-US" altLang="en-US" sz="1300" b="0" i="0" u="none" strike="noStrike" cap="none" normalizeH="0" baseline="0">
+                <a:ln>
+                  <a:noFill/>
+                </a:ln>
+                <a:solidFill>
+                  <a:schemeClr val="tx1"/>
+                </a:solidFill>
+                <a:effectLst/>
+                <a:latin typeface="Arial" panose="020B0604020202020204" pitchFamily="34" charset="0"/>
+              </a:rPr>
+              <a:t> düyməsidir. Hər </a:t>
+            </a:r>
+            <a:r>
+              <a:rPr kumimoji="0" lang="en-US" altLang="en-US" sz="1300" b="1" u="none" strike="noStrike" cap="none" normalizeH="0" baseline="0">
+                <a:ln>
+                  <a:noFill/>
+                </a:ln>
+                <a:solidFill>
+                  <a:schemeClr val="tx1"/>
+                </a:solidFill>
+                <a:effectLst/>
+                <a:latin typeface="Arial" panose="020B0604020202020204" pitchFamily="34" charset="0"/>
+              </a:rPr>
+              <a:t>post</a:t>
+            </a:r>
+            <a:r>
+              <a:rPr kumimoji="0" lang="en-US" altLang="en-US" sz="1300" b="0" i="0" u="none" strike="noStrike" cap="none" normalizeH="0" baseline="0">
+                <a:ln>
+                  <a:noFill/>
+                </a:ln>
+                <a:solidFill>
+                  <a:schemeClr val="tx1"/>
+                </a:solidFill>
+                <a:effectLst/>
+                <a:latin typeface="Arial" panose="020B0604020202020204" pitchFamily="34" charset="0"/>
+              </a:rPr>
+              <a:t> üçün bu düyməyə klik edəndə müvafiq </a:t>
+            </a:r>
+            <a:r>
+              <a:rPr kumimoji="0" lang="en-US" altLang="en-US" sz="1300" b="1" i="0" u="none" strike="noStrike" cap="none" normalizeH="0" baseline="0">
+                <a:ln>
+                  <a:noFill/>
+                </a:ln>
+                <a:solidFill>
+                  <a:schemeClr val="tx1"/>
+                </a:solidFill>
+                <a:effectLst/>
+                <a:latin typeface="Arial" panose="020B0604020202020204" pitchFamily="34" charset="0"/>
+              </a:rPr>
+              <a:t>post</a:t>
+            </a:r>
+            <a:r>
+              <a:rPr kumimoji="0" lang="en-US" altLang="en-US" sz="1300" b="0" i="0" u="none" strike="noStrike" cap="none" normalizeH="0" baseline="0">
+                <a:ln>
+                  <a:noFill/>
+                </a:ln>
+                <a:solidFill>
+                  <a:schemeClr val="tx1"/>
+                </a:solidFill>
+                <a:effectLst/>
+                <a:latin typeface="Arial" panose="020B0604020202020204" pitchFamily="34" charset="0"/>
+              </a:rPr>
+              <a:t>-un redaktə səhifəsinə yönləndirir.</a:t>
+            </a:r>
+            <a:endParaRPr kumimoji="0" lang="az-Latn-AZ" altLang="en-US" sz="1300" b="0" i="0" u="none" strike="noStrike" cap="none" normalizeH="0" baseline="0">
+              <a:ln>
+                <a:noFill/>
+              </a:ln>
+              <a:solidFill>
+                <a:schemeClr val="tx1"/>
+              </a:solidFill>
+              <a:effectLst/>
+              <a:latin typeface="Arial" panose="020B0604020202020204" pitchFamily="34" charset="0"/>
+            </a:endParaRPr>
+          </a:p>
+          <a:p>
+            <a:pPr>
+              <a:lnSpc>
+                <a:spcPct val="150000"/>
+              </a:lnSpc>
+              <a:buNone/>
+            </a:pPr>
+            <a:endParaRPr lang="az-Latn-AZ" altLang="en-US" sz="1300">
+              <a:latin typeface="Arial" panose="020B0604020202020204" pitchFamily="34" charset="0"/>
+            </a:endParaRPr>
+          </a:p>
+          <a:p>
+            <a:pPr>
+              <a:lnSpc>
+                <a:spcPct val="150000"/>
+              </a:lnSpc>
+              <a:buNone/>
+            </a:pPr>
+            <a:endParaRPr kumimoji="0" lang="az-Latn-AZ" altLang="en-US" sz="1300" b="0" i="0" u="none" strike="noStrike" cap="none" normalizeH="0" baseline="0">
+              <a:ln>
+                <a:noFill/>
+              </a:ln>
+              <a:solidFill>
+                <a:schemeClr val="tx1"/>
+              </a:solidFill>
+              <a:effectLst/>
+              <a:latin typeface="Arial" panose="020B0604020202020204" pitchFamily="34" charset="0"/>
+            </a:endParaRPr>
+          </a:p>
+          <a:p>
+            <a:pPr>
+              <a:lnSpc>
+                <a:spcPct val="150000"/>
+              </a:lnSpc>
+              <a:buNone/>
+            </a:pPr>
+            <a:endParaRPr lang="az-Latn-AZ" altLang="en-US" sz="1300">
+              <a:latin typeface="Arial" panose="020B0604020202020204" pitchFamily="34" charset="0"/>
+            </a:endParaRPr>
+          </a:p>
+          <a:p>
+            <a:pPr>
+              <a:lnSpc>
+                <a:spcPct val="150000"/>
+              </a:lnSpc>
+              <a:buNone/>
+            </a:pPr>
+            <a:endParaRPr kumimoji="0" lang="en-US" altLang="en-US" sz="1300" b="0" i="0" u="none" strike="noStrike" cap="none" normalizeH="0" baseline="0">
+              <a:ln>
+                <a:noFill/>
+              </a:ln>
+              <a:solidFill>
+                <a:schemeClr val="tx1"/>
+              </a:solidFill>
+              <a:effectLst/>
+              <a:latin typeface="Arial" panose="020B0604020202020204" pitchFamily="34" charset="0"/>
+            </a:endParaRPr>
+          </a:p>
+          <a:p>
+            <a:pPr>
+              <a:lnSpc>
+                <a:spcPct val="150000"/>
+              </a:lnSpc>
+              <a:buNone/>
+            </a:pPr>
+            <a:r>
+              <a:rPr kumimoji="0" lang="en-US" altLang="en-US" sz="1300" b="0" i="0" u="none" strike="noStrike" cap="none" normalizeH="0" baseline="0">
+                <a:ln>
+                  <a:noFill/>
+                </a:ln>
+                <a:solidFill>
+                  <a:schemeClr val="tx1"/>
+                </a:solidFill>
+                <a:effectLst/>
+                <a:latin typeface="Arial" panose="020B0604020202020204" pitchFamily="34" charset="0"/>
+              </a:rPr>
+              <a:t>Niyə route('posts.edit', $post-&gt;id)?</a:t>
+            </a:r>
+            <a:endParaRPr kumimoji="0" lang="az-Latn-AZ" altLang="en-US" sz="1300" b="0" i="0" u="none" strike="noStrike" cap="none" normalizeH="0" baseline="0">
+              <a:ln>
+                <a:noFill/>
+              </a:ln>
+              <a:solidFill>
+                <a:schemeClr val="tx1"/>
+              </a:solidFill>
+              <a:effectLst/>
+              <a:latin typeface="Arial" panose="020B0604020202020204" pitchFamily="34" charset="0"/>
+            </a:endParaRPr>
+          </a:p>
+          <a:p>
+            <a:pPr>
+              <a:lnSpc>
+                <a:spcPct val="150000"/>
+              </a:lnSpc>
+              <a:buNone/>
+            </a:pPr>
+            <a:endParaRPr kumimoji="0" lang="en-US" altLang="en-US" sz="1300" b="0" i="0" u="none" strike="noStrike" cap="none" normalizeH="0" baseline="0">
+              <a:ln>
+                <a:noFill/>
+              </a:ln>
+              <a:solidFill>
+                <a:schemeClr val="tx1"/>
+              </a:solidFill>
+              <a:effectLst/>
+              <a:latin typeface="Arial" panose="020B0604020202020204" pitchFamily="34" charset="0"/>
+            </a:endParaRPr>
+          </a:p>
+          <a:p>
+            <a:pPr>
+              <a:lnSpc>
+                <a:spcPct val="150000"/>
+              </a:lnSpc>
+              <a:buNone/>
+            </a:pPr>
+            <a:r>
+              <a:rPr kumimoji="0" lang="en-US" altLang="en-US" sz="1300" b="0" i="0" u="none" strike="noStrike" cap="none" normalizeH="0" baseline="0">
+                <a:ln>
+                  <a:noFill/>
+                </a:ln>
+                <a:solidFill>
+                  <a:schemeClr val="tx1"/>
+                </a:solidFill>
+                <a:effectLst/>
+                <a:latin typeface="Arial" panose="020B0604020202020204" pitchFamily="34" charset="0"/>
+              </a:rPr>
+              <a:t>Bu Laravel-də </a:t>
+            </a:r>
+            <a:r>
+              <a:rPr kumimoji="0" lang="en-US" altLang="en-US" sz="1300" b="1" i="0" u="none" strike="noStrike" cap="none" normalizeH="0" baseline="0">
+                <a:ln>
+                  <a:noFill/>
+                </a:ln>
+                <a:solidFill>
+                  <a:schemeClr val="tx1"/>
+                </a:solidFill>
+                <a:effectLst/>
+                <a:latin typeface="Arial" panose="020B0604020202020204" pitchFamily="34" charset="0"/>
+              </a:rPr>
+              <a:t>named route</a:t>
+            </a:r>
+            <a:r>
+              <a:rPr kumimoji="0" lang="en-US" altLang="en-US" sz="1300" b="0" i="0" u="none" strike="noStrike" cap="none" normalizeH="0" baseline="0">
+                <a:ln>
+                  <a:noFill/>
+                </a:ln>
+                <a:solidFill>
+                  <a:schemeClr val="tx1"/>
+                </a:solidFill>
+                <a:effectLst/>
+                <a:latin typeface="Arial" panose="020B0604020202020204" pitchFamily="34" charset="0"/>
+              </a:rPr>
+              <a:t>-a dinamik </a:t>
+            </a:r>
+            <a:r>
+              <a:rPr kumimoji="0" lang="en-US" altLang="en-US" sz="1300" b="1" i="0" u="none" strike="noStrike" cap="none" normalizeH="0" baseline="0">
+                <a:ln>
+                  <a:noFill/>
+                </a:ln>
+                <a:solidFill>
+                  <a:schemeClr val="tx1"/>
+                </a:solidFill>
+                <a:effectLst/>
+                <a:latin typeface="Arial" panose="020B0604020202020204" pitchFamily="34" charset="0"/>
+              </a:rPr>
+              <a:t>URL</a:t>
+            </a:r>
+            <a:r>
+              <a:rPr kumimoji="0" lang="en-US" altLang="en-US" sz="1300" b="0" i="0" u="none" strike="noStrike" cap="none" normalizeH="0" baseline="0">
+                <a:ln>
+                  <a:noFill/>
+                </a:ln>
+                <a:solidFill>
+                  <a:schemeClr val="tx1"/>
+                </a:solidFill>
+                <a:effectLst/>
+                <a:latin typeface="Arial" panose="020B0604020202020204" pitchFamily="34" charset="0"/>
+              </a:rPr>
+              <a:t> ötürmək üçündür.</a:t>
+            </a:r>
+          </a:p>
+          <a:p>
+            <a:pPr marL="742950" lvl="1" indent="-285750">
+              <a:lnSpc>
+                <a:spcPct val="150000"/>
+              </a:lnSpc>
+              <a:buFont typeface="Arial" panose="020B0604020202020204" pitchFamily="34" charset="0"/>
+              <a:buChar char="•"/>
+            </a:pPr>
+            <a:r>
+              <a:rPr kumimoji="0" lang="en-US" altLang="en-US" sz="1300" b="1" i="0" u="none" strike="noStrike" cap="none" normalizeH="0" baseline="0">
+                <a:ln>
+                  <a:noFill/>
+                </a:ln>
+                <a:solidFill>
+                  <a:srgbClr val="00B050"/>
+                </a:solidFill>
+                <a:effectLst/>
+                <a:latin typeface="Arial" panose="020B0604020202020204" pitchFamily="34" charset="0"/>
+              </a:rPr>
+              <a:t>posts.edit </a:t>
+            </a:r>
+            <a:r>
+              <a:rPr kumimoji="0" lang="en-US" altLang="en-US" sz="1300" b="0" i="0" u="none" strike="noStrike" cap="none" normalizeH="0" baseline="0">
+                <a:ln>
+                  <a:noFill/>
+                </a:ln>
+                <a:solidFill>
+                  <a:schemeClr val="tx1"/>
+                </a:solidFill>
+                <a:effectLst/>
+                <a:latin typeface="Arial" panose="020B0604020202020204" pitchFamily="34" charset="0"/>
+              </a:rPr>
+              <a:t>→ route-un adıdır.</a:t>
+            </a:r>
+          </a:p>
+          <a:p>
+            <a:pPr marL="742950" lvl="1" indent="-285750">
+              <a:lnSpc>
+                <a:spcPct val="150000"/>
+              </a:lnSpc>
+              <a:buFont typeface="Arial" panose="020B0604020202020204" pitchFamily="34" charset="0"/>
+              <a:buChar char="•"/>
+            </a:pPr>
+            <a:r>
+              <a:rPr kumimoji="0" lang="en-US" altLang="en-US" sz="1300" b="1" i="0" u="none" strike="noStrike" cap="none" normalizeH="0" baseline="0">
+                <a:ln>
+                  <a:noFill/>
+                </a:ln>
+                <a:solidFill>
+                  <a:srgbClr val="00B050"/>
+                </a:solidFill>
+                <a:effectLst/>
+                <a:latin typeface="Arial" panose="020B0604020202020204" pitchFamily="34" charset="0"/>
+              </a:rPr>
+              <a:t>$post-&gt;id </a:t>
+            </a:r>
+            <a:r>
+              <a:rPr kumimoji="0" lang="en-US" altLang="en-US" sz="1300" b="0" i="0" u="none" strike="noStrike" cap="none" normalizeH="0" baseline="0">
+                <a:ln>
+                  <a:noFill/>
+                </a:ln>
+                <a:solidFill>
+                  <a:schemeClr val="tx1"/>
+                </a:solidFill>
+                <a:effectLst/>
+                <a:latin typeface="Arial" panose="020B0604020202020204" pitchFamily="34" charset="0"/>
+              </a:rPr>
+              <a:t>→ bu, həmin </a:t>
+            </a:r>
+            <a:r>
+              <a:rPr kumimoji="0" lang="en-US" altLang="en-US" sz="1300" b="1" i="0" u="none" strike="noStrike" cap="none" normalizeH="0" baseline="0">
+                <a:ln>
+                  <a:noFill/>
+                </a:ln>
+                <a:solidFill>
+                  <a:schemeClr val="tx1"/>
+                </a:solidFill>
+                <a:effectLst/>
+                <a:latin typeface="Arial" panose="020B0604020202020204" pitchFamily="34" charset="0"/>
+              </a:rPr>
+              <a:t>posta</a:t>
+            </a:r>
+            <a:r>
+              <a:rPr kumimoji="0" lang="en-US" altLang="en-US" sz="1300" b="0" i="0" u="none" strike="noStrike" cap="none" normalizeH="0" baseline="0">
+                <a:ln>
+                  <a:noFill/>
+                </a:ln>
+                <a:solidFill>
+                  <a:schemeClr val="tx1"/>
+                </a:solidFill>
+                <a:effectLst/>
+                <a:latin typeface="Arial" panose="020B0604020202020204" pitchFamily="34" charset="0"/>
+              </a:rPr>
+              <a:t> aid unikal </a:t>
+            </a:r>
+            <a:r>
+              <a:rPr kumimoji="0" lang="en-US" altLang="en-US" sz="1300" b="1" i="0" u="none" strike="noStrike" cap="none" normalizeH="0" baseline="0">
+                <a:ln>
+                  <a:noFill/>
+                </a:ln>
+                <a:solidFill>
+                  <a:schemeClr val="tx1"/>
+                </a:solidFill>
+                <a:effectLst/>
+                <a:latin typeface="Arial" panose="020B0604020202020204" pitchFamily="34" charset="0"/>
+              </a:rPr>
+              <a:t>id</a:t>
+            </a:r>
+            <a:r>
+              <a:rPr kumimoji="0" lang="en-US" altLang="en-US" sz="1300" b="0" i="0" u="none" strike="noStrike" cap="none" normalizeH="0" baseline="0">
+                <a:ln>
+                  <a:noFill/>
+                </a:ln>
+                <a:solidFill>
+                  <a:schemeClr val="tx1"/>
+                </a:solidFill>
+                <a:effectLst/>
+                <a:latin typeface="Arial" panose="020B0604020202020204" pitchFamily="34" charset="0"/>
+              </a:rPr>
+              <a:t>-dir (məsələn 5). Bu </a:t>
+            </a:r>
+            <a:r>
+              <a:rPr kumimoji="0" lang="en-US" altLang="en-US" sz="1300" b="1" i="0" u="none" strike="noStrike" cap="none" normalizeH="0" baseline="0">
+                <a:ln>
+                  <a:noFill/>
+                </a:ln>
+                <a:solidFill>
+                  <a:schemeClr val="tx1"/>
+                </a:solidFill>
+                <a:effectLst/>
+                <a:latin typeface="Arial" panose="020B0604020202020204" pitchFamily="34" charset="0"/>
+              </a:rPr>
+              <a:t>id</a:t>
+            </a:r>
+            <a:r>
+              <a:rPr kumimoji="0" lang="en-US" altLang="en-US" sz="1300" b="0" i="0" u="none" strike="noStrike" cap="none" normalizeH="0" baseline="0">
+                <a:ln>
+                  <a:noFill/>
+                </a:ln>
+                <a:solidFill>
+                  <a:schemeClr val="tx1"/>
+                </a:solidFill>
+                <a:effectLst/>
+                <a:latin typeface="Arial" panose="020B0604020202020204" pitchFamily="34" charset="0"/>
+              </a:rPr>
+              <a:t> route-a ötürülür, beləliklə yaranan link belə olur:</a:t>
+            </a:r>
+            <a:endParaRPr kumimoji="0" lang="az-Latn-AZ" altLang="en-US" sz="1300" b="0" i="0" u="none" strike="noStrike" cap="none" normalizeH="0" baseline="0">
+              <a:ln>
+                <a:noFill/>
+              </a:ln>
+              <a:solidFill>
+                <a:schemeClr val="tx1"/>
+              </a:solidFill>
+              <a:effectLst/>
+              <a:latin typeface="Arial" panose="020B0604020202020204" pitchFamily="34" charset="0"/>
+            </a:endParaRPr>
+          </a:p>
+          <a:p>
+            <a:pPr>
+              <a:lnSpc>
+                <a:spcPct val="150000"/>
+              </a:lnSpc>
+              <a:buNone/>
+            </a:pPr>
+            <a:endParaRPr lang="az-Latn-AZ" altLang="en-US" sz="1300">
+              <a:latin typeface="Arial" panose="020B0604020202020204" pitchFamily="34" charset="0"/>
+            </a:endParaRPr>
+          </a:p>
+          <a:p>
+            <a:pPr>
+              <a:lnSpc>
+                <a:spcPct val="150000"/>
+              </a:lnSpc>
+              <a:buNone/>
+            </a:pPr>
+            <a:endParaRPr kumimoji="0" lang="az-Latn-AZ" altLang="en-US" sz="1300" b="0" i="0" u="none" strike="noStrike" cap="none" normalizeH="0" baseline="0">
+              <a:ln>
+                <a:noFill/>
+              </a:ln>
+              <a:solidFill>
+                <a:schemeClr val="tx1"/>
+              </a:solidFill>
+              <a:effectLst/>
+              <a:latin typeface="Arial" panose="020B0604020202020204" pitchFamily="34" charset="0"/>
+            </a:endParaRPr>
+          </a:p>
+          <a:p>
+            <a:pPr>
+              <a:lnSpc>
+                <a:spcPct val="150000"/>
+              </a:lnSpc>
+              <a:buNone/>
+            </a:pPr>
+            <a:endParaRPr lang="az-Latn-AZ" altLang="en-US" sz="1300">
+              <a:latin typeface="Arial" panose="020B0604020202020204" pitchFamily="34" charset="0"/>
+            </a:endParaRPr>
+          </a:p>
+          <a:p>
+            <a:pPr>
+              <a:lnSpc>
+                <a:spcPct val="150000"/>
+              </a:lnSpc>
+              <a:buNone/>
+            </a:pPr>
+            <a:endParaRPr kumimoji="0" lang="az-Latn-AZ" altLang="en-US" sz="1300" b="0" i="0" u="none" strike="noStrike" cap="none" normalizeH="0" baseline="0">
+              <a:ln>
+                <a:noFill/>
+              </a:ln>
+              <a:solidFill>
+                <a:schemeClr val="tx1"/>
+              </a:solidFill>
+              <a:effectLst/>
+              <a:latin typeface="Arial" panose="020B0604020202020204" pitchFamily="34" charset="0"/>
+            </a:endParaRPr>
+          </a:p>
+          <a:p>
+            <a:pPr>
+              <a:lnSpc>
+                <a:spcPct val="150000"/>
+              </a:lnSpc>
+              <a:buNone/>
+            </a:pPr>
+            <a:endParaRPr lang="az-Latn-AZ" altLang="en-US" sz="1300">
+              <a:latin typeface="Arial" panose="020B0604020202020204" pitchFamily="34" charset="0"/>
+            </a:endParaRPr>
+          </a:p>
+          <a:p>
+            <a:pPr>
+              <a:lnSpc>
+                <a:spcPct val="150000"/>
+              </a:lnSpc>
+              <a:buNone/>
+            </a:pPr>
+            <a:r>
+              <a:rPr kumimoji="0" lang="en-US" altLang="en-US" sz="1300" b="0" i="0" u="none" strike="noStrike" cap="none" normalizeH="0" baseline="0">
+                <a:ln>
+                  <a:noFill/>
+                </a:ln>
+                <a:solidFill>
+                  <a:schemeClr val="tx1"/>
+                </a:solidFill>
+                <a:effectLst/>
+                <a:latin typeface="Arial" panose="020B0604020202020204" pitchFamily="34" charset="0"/>
+              </a:rPr>
+              <a:t>Bu </a:t>
+            </a:r>
+            <a:r>
+              <a:rPr kumimoji="0" lang="en-US" altLang="en-US" sz="1300" b="1" i="0" u="none" strike="noStrike" cap="none" normalizeH="0" baseline="0">
+                <a:ln>
+                  <a:noFill/>
+                </a:ln>
+                <a:solidFill>
+                  <a:schemeClr val="tx1"/>
+                </a:solidFill>
+                <a:effectLst/>
+                <a:latin typeface="Arial" panose="020B0604020202020204" pitchFamily="34" charset="0"/>
+              </a:rPr>
+              <a:t>URL</a:t>
+            </a:r>
+            <a:r>
+              <a:rPr kumimoji="0" lang="en-US" altLang="en-US" sz="1300" b="0" i="0" u="none" strike="noStrike" cap="none" normalizeH="0" baseline="0">
+                <a:ln>
+                  <a:noFill/>
+                </a:ln>
+                <a:solidFill>
+                  <a:schemeClr val="tx1"/>
+                </a:solidFill>
+                <a:effectLst/>
+                <a:latin typeface="Arial" panose="020B0604020202020204" pitchFamily="34" charset="0"/>
+              </a:rPr>
+              <a:t>-yə daxil olduqda, Laravel</a:t>
+            </a:r>
+            <a:r>
+              <a:rPr lang="az-Latn-AZ" altLang="en-US" sz="1300">
+                <a:latin typeface="Arial" panose="020B0604020202020204" pitchFamily="34" charset="0"/>
+              </a:rPr>
+              <a:t> bizi,</a:t>
+            </a:r>
+            <a:r>
+              <a:rPr kumimoji="0" lang="en-US" altLang="en-US" sz="1300" b="0" i="0" u="none" strike="noStrike" cap="none" normalizeH="0" baseline="0">
+                <a:ln>
+                  <a:noFill/>
+                </a:ln>
+                <a:solidFill>
+                  <a:schemeClr val="tx1"/>
+                </a:solidFill>
+                <a:effectLst/>
+                <a:latin typeface="Arial" panose="020B0604020202020204" pitchFamily="34" charset="0"/>
+              </a:rPr>
+              <a:t> </a:t>
+            </a:r>
+            <a:r>
+              <a:rPr kumimoji="0" lang="az-Latn-AZ" altLang="en-US" sz="1300" b="0" i="0" u="none" strike="noStrike" cap="none" normalizeH="0" baseline="0">
+                <a:ln>
+                  <a:noFill/>
+                </a:ln>
+                <a:solidFill>
+                  <a:schemeClr val="tx1"/>
+                </a:solidFill>
+                <a:effectLst/>
+                <a:latin typeface="Arial" panose="020B0604020202020204" pitchFamily="34" charset="0"/>
+              </a:rPr>
+              <a:t>növbəti slayddakı</a:t>
+            </a:r>
+            <a:r>
+              <a:rPr kumimoji="0" lang="en-US" altLang="en-US" sz="1300" b="0" i="0" u="none" strike="noStrike" cap="none" normalizeH="0" baseline="0">
+                <a:ln>
+                  <a:noFill/>
+                </a:ln>
+                <a:solidFill>
+                  <a:schemeClr val="tx1"/>
+                </a:solidFill>
+                <a:effectLst/>
+                <a:latin typeface="Arial" panose="020B0604020202020204" pitchFamily="34" charset="0"/>
+              </a:rPr>
+              <a:t> </a:t>
+            </a:r>
+            <a:r>
+              <a:rPr kumimoji="0" lang="en-US" altLang="en-US" sz="1300" b="1" i="0" u="none" strike="noStrike" cap="none" normalizeH="0" baseline="0">
+                <a:ln>
+                  <a:noFill/>
+                </a:ln>
+                <a:solidFill>
+                  <a:schemeClr val="tx1"/>
+                </a:solidFill>
+                <a:effectLst/>
+                <a:latin typeface="Arial" panose="020B0604020202020204" pitchFamily="34" charset="0"/>
+              </a:rPr>
+              <a:t>edit() </a:t>
+            </a:r>
+            <a:r>
+              <a:rPr kumimoji="0" lang="en-US" altLang="en-US" sz="1300" b="0" i="0" u="none" strike="noStrike" cap="none" normalizeH="0" baseline="0">
+                <a:ln>
+                  <a:noFill/>
+                </a:ln>
+                <a:solidFill>
+                  <a:schemeClr val="tx1"/>
+                </a:solidFill>
+                <a:effectLst/>
+                <a:latin typeface="Arial" panose="020B0604020202020204" pitchFamily="34" charset="0"/>
+              </a:rPr>
+              <a:t>metoduna yönləndirir.</a:t>
             </a:r>
           </a:p>
         </p:txBody>
       </p:sp>
+      <p:pic>
+        <p:nvPicPr>
+          <p:cNvPr id="4" name="Picture 3">
+            <a:extLst>
+              <a:ext uri="{FF2B5EF4-FFF2-40B4-BE49-F238E27FC236}">
+                <a16:creationId xmlns:a16="http://schemas.microsoft.com/office/drawing/2014/main" id="{ED1CD55F-617B-8427-175D-E16CC1F20937}"/>
+              </a:ext>
+            </a:extLst>
+          </p:cNvPr>
+          <p:cNvPicPr>
+            <a:picLocks noChangeAspect="1"/>
+          </p:cNvPicPr>
+          <p:nvPr/>
+        </p:nvPicPr>
+        <p:blipFill>
+          <a:blip r:embed="rId2"/>
+          <a:stretch>
+            <a:fillRect/>
+          </a:stretch>
+        </p:blipFill>
+        <p:spPr>
+          <a:xfrm>
+            <a:off x="0" y="795339"/>
+            <a:ext cx="7097115" cy="685896"/>
+          </a:xfrm>
+          <a:prstGeom prst="rect">
+            <a:avLst/>
+          </a:prstGeom>
+        </p:spPr>
+      </p:pic>
+      <p:pic>
+        <p:nvPicPr>
+          <p:cNvPr id="6" name="Picture 5">
+            <a:extLst>
+              <a:ext uri="{FF2B5EF4-FFF2-40B4-BE49-F238E27FC236}">
+                <a16:creationId xmlns:a16="http://schemas.microsoft.com/office/drawing/2014/main" id="{812EE45A-C322-89CF-2EE5-E025EB643571}"/>
+              </a:ext>
+            </a:extLst>
+          </p:cNvPr>
+          <p:cNvPicPr>
+            <a:picLocks noChangeAspect="1"/>
+          </p:cNvPicPr>
+          <p:nvPr/>
+        </p:nvPicPr>
+        <p:blipFill>
+          <a:blip r:embed="rId3"/>
+          <a:stretch>
+            <a:fillRect/>
+          </a:stretch>
+        </p:blipFill>
+        <p:spPr>
+          <a:xfrm>
+            <a:off x="0" y="3436070"/>
+            <a:ext cx="1829055" cy="533474"/>
+          </a:xfrm>
+          <a:prstGeom prst="rect">
+            <a:avLst/>
+          </a:prstGeom>
+        </p:spPr>
+      </p:pic>
     </p:spTree>
     <p:extLst>
       <p:ext uri="{BB962C8B-B14F-4D97-AF65-F5344CB8AC3E}">
@@ -3571,6 +5267,1834 @@
 </file>
 
 <file path=ppt/slides/slide4.xml><?xml version="1.0" encoding="utf-8"?>
+<p:sld xmlns:a="http://schemas.openxmlformats.org/drawingml/2006/main" xmlns:r="http://schemas.openxmlformats.org/officeDocument/2006/relationships" xmlns:p="http://schemas.openxmlformats.org/presentationml/2006/main">
+  <p:cSld>
+    <p:spTree>
+      <p:nvGrpSpPr>
+        <p:cNvPr id="1" name="">
+          <a:extLst>
+            <a:ext uri="{FF2B5EF4-FFF2-40B4-BE49-F238E27FC236}">
+              <a16:creationId xmlns:a16="http://schemas.microsoft.com/office/drawing/2014/main" id="{D3A20484-CA03-12CD-89CC-88CE2B612200}"/>
+            </a:ext>
+          </a:extLst>
+        </p:cNvPr>
+        <p:cNvGrpSpPr/>
+        <p:nvPr/>
+      </p:nvGrpSpPr>
+      <p:grpSpPr>
+        <a:xfrm>
+          <a:off x="0" y="0"/>
+          <a:ext cx="0" cy="0"/>
+          <a:chOff x="0" y="0"/>
+          <a:chExt cx="0" cy="0"/>
+        </a:xfrm>
+      </p:grpSpPr>
+      <p:sp>
+        <p:nvSpPr>
+          <p:cNvPr id="3" name="TextBox 2">
+            <a:extLst>
+              <a:ext uri="{FF2B5EF4-FFF2-40B4-BE49-F238E27FC236}">
+                <a16:creationId xmlns:a16="http://schemas.microsoft.com/office/drawing/2014/main" id="{9217D69C-142E-473F-9C04-5378F3797C10}"/>
+              </a:ext>
+            </a:extLst>
+          </p:cNvPr>
+          <p:cNvSpPr txBox="1"/>
+          <p:nvPr/>
+        </p:nvSpPr>
+        <p:spPr>
+          <a:xfrm>
+            <a:off x="217714" y="255046"/>
+            <a:ext cx="11756571" cy="6056915"/>
+          </a:xfrm>
+          <a:prstGeom prst="rect">
+            <a:avLst/>
+          </a:prstGeom>
+          <a:noFill/>
+        </p:spPr>
+        <p:txBody>
+          <a:bodyPr wrap="square">
+            <a:spAutoFit/>
+          </a:bodyPr>
+          <a:lstStyle/>
+          <a:p>
+            <a:pPr>
+              <a:lnSpc>
+                <a:spcPct val="150000"/>
+              </a:lnSpc>
+              <a:buNone/>
+            </a:pPr>
+            <a:r>
+              <a:rPr kumimoji="0" lang="en-US" altLang="en-US" sz="1300" b="0" i="0" u="none" strike="noStrike" cap="none" normalizeH="0" baseline="0">
+                <a:ln>
+                  <a:noFill/>
+                </a:ln>
+                <a:solidFill>
+                  <a:schemeClr val="tx1"/>
+                </a:solidFill>
+                <a:effectLst/>
+                <a:latin typeface="Arial" panose="020B0604020202020204" pitchFamily="34" charset="0"/>
+              </a:rPr>
+              <a:t>3) Controller-dəki Edit metodu:</a:t>
+            </a:r>
+            <a:endParaRPr kumimoji="0" lang="az-Latn-AZ" altLang="en-US" sz="1300" b="0" i="0" u="none" strike="noStrike" cap="none" normalizeH="0" baseline="0">
+              <a:ln>
+                <a:noFill/>
+              </a:ln>
+              <a:solidFill>
+                <a:schemeClr val="tx1"/>
+              </a:solidFill>
+              <a:effectLst/>
+              <a:latin typeface="Arial" panose="020B0604020202020204" pitchFamily="34" charset="0"/>
+            </a:endParaRPr>
+          </a:p>
+          <a:p>
+            <a:pPr>
+              <a:lnSpc>
+                <a:spcPct val="150000"/>
+              </a:lnSpc>
+              <a:buNone/>
+            </a:pPr>
+            <a:endParaRPr lang="az-Latn-AZ" altLang="en-US" sz="1300">
+              <a:latin typeface="Arial" panose="020B0604020202020204" pitchFamily="34" charset="0"/>
+            </a:endParaRPr>
+          </a:p>
+          <a:p>
+            <a:pPr>
+              <a:lnSpc>
+                <a:spcPct val="150000"/>
+              </a:lnSpc>
+              <a:buNone/>
+            </a:pPr>
+            <a:endParaRPr kumimoji="0" lang="az-Latn-AZ" altLang="en-US" sz="1300" b="0" i="0" u="none" strike="noStrike" cap="none" normalizeH="0" baseline="0">
+              <a:ln>
+                <a:noFill/>
+              </a:ln>
+              <a:solidFill>
+                <a:schemeClr val="tx1"/>
+              </a:solidFill>
+              <a:effectLst/>
+              <a:latin typeface="Arial" panose="020B0604020202020204" pitchFamily="34" charset="0"/>
+            </a:endParaRPr>
+          </a:p>
+          <a:p>
+            <a:pPr>
+              <a:lnSpc>
+                <a:spcPct val="150000"/>
+              </a:lnSpc>
+              <a:buNone/>
+            </a:pPr>
+            <a:endParaRPr lang="az-Latn-AZ" altLang="en-US" sz="1300">
+              <a:latin typeface="Arial" panose="020B0604020202020204" pitchFamily="34" charset="0"/>
+            </a:endParaRPr>
+          </a:p>
+          <a:p>
+            <a:pPr>
+              <a:lnSpc>
+                <a:spcPct val="150000"/>
+              </a:lnSpc>
+              <a:buNone/>
+            </a:pPr>
+            <a:endParaRPr kumimoji="0" lang="az-Latn-AZ" altLang="en-US" sz="1300" b="0" i="0" u="none" strike="noStrike" cap="none" normalizeH="0" baseline="0">
+              <a:ln>
+                <a:noFill/>
+              </a:ln>
+              <a:solidFill>
+                <a:schemeClr val="tx1"/>
+              </a:solidFill>
+              <a:effectLst/>
+              <a:latin typeface="Arial" panose="020B0604020202020204" pitchFamily="34" charset="0"/>
+            </a:endParaRPr>
+          </a:p>
+          <a:p>
+            <a:pPr>
+              <a:lnSpc>
+                <a:spcPct val="150000"/>
+              </a:lnSpc>
+              <a:buNone/>
+            </a:pPr>
+            <a:endParaRPr kumimoji="0" lang="az-Latn-AZ" altLang="en-US" sz="1300" b="0" i="0" u="none" strike="noStrike" cap="none" normalizeH="0" baseline="0">
+              <a:ln>
+                <a:noFill/>
+              </a:ln>
+              <a:solidFill>
+                <a:schemeClr val="tx1"/>
+              </a:solidFill>
+              <a:effectLst/>
+              <a:latin typeface="Arial" panose="020B0604020202020204" pitchFamily="34" charset="0"/>
+            </a:endParaRPr>
+          </a:p>
+          <a:p>
+            <a:pPr>
+              <a:lnSpc>
+                <a:spcPct val="150000"/>
+              </a:lnSpc>
+              <a:buNone/>
+            </a:pPr>
+            <a:endParaRPr lang="az-Latn-AZ" altLang="en-US" sz="1300">
+              <a:latin typeface="Arial" panose="020B0604020202020204" pitchFamily="34" charset="0"/>
+            </a:endParaRPr>
+          </a:p>
+          <a:p>
+            <a:pPr>
+              <a:lnSpc>
+                <a:spcPct val="150000"/>
+              </a:lnSpc>
+              <a:buNone/>
+            </a:pPr>
+            <a:endParaRPr kumimoji="0" lang="az-Latn-AZ" altLang="en-US" sz="1300" b="0" i="0" u="none" strike="noStrike" cap="none" normalizeH="0" baseline="0">
+              <a:ln>
+                <a:noFill/>
+              </a:ln>
+              <a:solidFill>
+                <a:schemeClr val="tx1"/>
+              </a:solidFill>
+              <a:effectLst/>
+              <a:latin typeface="Arial" panose="020B0604020202020204" pitchFamily="34" charset="0"/>
+            </a:endParaRPr>
+          </a:p>
+          <a:p>
+            <a:pPr>
+              <a:lnSpc>
+                <a:spcPct val="150000"/>
+              </a:lnSpc>
+              <a:buNone/>
+            </a:pPr>
+            <a:r>
+              <a:rPr kumimoji="0" lang="en-US" altLang="en-US" sz="1300" b="0" i="0" u="none" strike="noStrike" cap="none" normalizeH="0" baseline="0">
+                <a:ln>
+                  <a:noFill/>
+                </a:ln>
+                <a:solidFill>
+                  <a:schemeClr val="tx1"/>
+                </a:solidFill>
+                <a:effectLst/>
+                <a:latin typeface="Arial" panose="020B0604020202020204" pitchFamily="34" charset="0"/>
+              </a:rPr>
+              <a:t>Bu metod nə edir?</a:t>
+            </a:r>
+            <a:r>
+              <a:rPr kumimoji="0" lang="az-Latn-AZ" altLang="en-US" sz="1300" b="0" i="0" u="none" strike="noStrike" cap="none" normalizeH="0" baseline="0">
+                <a:ln>
+                  <a:noFill/>
+                </a:ln>
+                <a:solidFill>
+                  <a:schemeClr val="tx1"/>
+                </a:solidFill>
+                <a:effectLst/>
+                <a:latin typeface="Arial" panose="020B0604020202020204" pitchFamily="34" charset="0"/>
+              </a:rPr>
+              <a:t> </a:t>
+            </a:r>
+            <a:r>
+              <a:rPr kumimoji="0" lang="en-US" altLang="en-US" sz="1300" b="0" i="0" u="none" strike="noStrike" cap="none" normalizeH="0" baseline="0">
+                <a:ln>
+                  <a:noFill/>
+                </a:ln>
+                <a:solidFill>
+                  <a:schemeClr val="tx1"/>
+                </a:solidFill>
+                <a:effectLst/>
+                <a:latin typeface="Arial" panose="020B0604020202020204" pitchFamily="34" charset="0"/>
+              </a:rPr>
+              <a:t>Parametr alır:</a:t>
+            </a:r>
+          </a:p>
+          <a:p>
+            <a:pPr marL="742950" lvl="1" indent="-285750">
+              <a:lnSpc>
+                <a:spcPct val="150000"/>
+              </a:lnSpc>
+              <a:buFont typeface="Wingdings" panose="05000000000000000000" pitchFamily="2" charset="2"/>
+              <a:buChar char="q"/>
+            </a:pPr>
+            <a:r>
+              <a:rPr kumimoji="0" lang="en-US" altLang="en-US" sz="1300" b="1" i="0" u="none" strike="noStrike" cap="none" normalizeH="0" baseline="0">
+                <a:ln>
+                  <a:noFill/>
+                </a:ln>
+                <a:solidFill>
+                  <a:schemeClr val="tx1"/>
+                </a:solidFill>
+                <a:effectLst/>
+                <a:latin typeface="Arial" panose="020B0604020202020204" pitchFamily="34" charset="0"/>
+              </a:rPr>
+              <a:t>URL</a:t>
+            </a:r>
+            <a:r>
+              <a:rPr kumimoji="0" lang="en-US" altLang="en-US" sz="1300" b="0" i="0" u="none" strike="noStrike" cap="none" normalizeH="0" baseline="0">
+                <a:ln>
+                  <a:noFill/>
+                </a:ln>
+                <a:solidFill>
+                  <a:schemeClr val="tx1"/>
+                </a:solidFill>
+                <a:effectLst/>
+                <a:latin typeface="Arial" panose="020B0604020202020204" pitchFamily="34" charset="0"/>
+              </a:rPr>
+              <a:t>-dən </a:t>
+            </a:r>
+            <a:r>
+              <a:rPr kumimoji="0" lang="en-US" altLang="en-US" sz="1300" b="1" i="0" u="none" strike="noStrike" cap="none" normalizeH="0" baseline="0">
+                <a:ln>
+                  <a:noFill/>
+                </a:ln>
+                <a:solidFill>
+                  <a:schemeClr val="tx1"/>
+                </a:solidFill>
+                <a:effectLst/>
+                <a:latin typeface="Arial" panose="020B0604020202020204" pitchFamily="34" charset="0"/>
+              </a:rPr>
+              <a:t>id</a:t>
+            </a:r>
+            <a:r>
+              <a:rPr kumimoji="0" lang="en-US" altLang="en-US" sz="1300" b="0" i="0" u="none" strike="noStrike" cap="none" normalizeH="0" baseline="0">
+                <a:ln>
+                  <a:noFill/>
+                </a:ln>
+                <a:solidFill>
+                  <a:schemeClr val="tx1"/>
+                </a:solidFill>
+                <a:effectLst/>
+                <a:latin typeface="Arial" panose="020B0604020202020204" pitchFamily="34" charset="0"/>
+              </a:rPr>
+              <a:t> dəyərini (</a:t>
+            </a:r>
+            <a:r>
+              <a:rPr kumimoji="0" lang="en-US" altLang="en-US" sz="1300" b="1" i="0" u="none" strike="noStrike" cap="none" normalizeH="0" baseline="0">
+                <a:ln>
+                  <a:noFill/>
+                </a:ln>
+                <a:solidFill>
+                  <a:schemeClr val="tx1"/>
+                </a:solidFill>
+                <a:effectLst/>
+                <a:latin typeface="Arial" panose="020B0604020202020204" pitchFamily="34" charset="0"/>
+              </a:rPr>
+              <a:t>posts/5/edit </a:t>
+            </a:r>
+            <a:r>
+              <a:rPr kumimoji="0" lang="en-US" altLang="en-US" sz="1300" b="0" i="0" u="none" strike="noStrike" cap="none" normalizeH="0" baseline="0">
+                <a:ln>
+                  <a:noFill/>
+                </a:ln>
+                <a:solidFill>
+                  <a:schemeClr val="tx1"/>
+                </a:solidFill>
+                <a:effectLst/>
+                <a:latin typeface="Arial" panose="020B0604020202020204" pitchFamily="34" charset="0"/>
+              </a:rPr>
+              <a:t>→ 5) alır.</a:t>
+            </a:r>
+          </a:p>
+          <a:p>
+            <a:pPr>
+              <a:lnSpc>
+                <a:spcPct val="150000"/>
+              </a:lnSpc>
+              <a:buNone/>
+            </a:pPr>
+            <a:endParaRPr kumimoji="0" lang="en-US" altLang="en-US" sz="1300" b="0" i="0" u="none" strike="noStrike" cap="none" normalizeH="0" baseline="0">
+              <a:ln>
+                <a:noFill/>
+              </a:ln>
+              <a:solidFill>
+                <a:schemeClr val="tx1"/>
+              </a:solidFill>
+              <a:effectLst/>
+              <a:latin typeface="Arial" panose="020B0604020202020204" pitchFamily="34" charset="0"/>
+            </a:endParaRPr>
+          </a:p>
+          <a:p>
+            <a:pPr>
+              <a:lnSpc>
+                <a:spcPct val="150000"/>
+              </a:lnSpc>
+              <a:buNone/>
+            </a:pPr>
+            <a:r>
+              <a:rPr kumimoji="0" lang="en-US" altLang="en-US" sz="1300" b="0" i="0" u="none" strike="noStrike" cap="none" normalizeH="0" baseline="0">
+                <a:ln>
+                  <a:noFill/>
+                </a:ln>
+                <a:solidFill>
+                  <a:schemeClr val="tx1"/>
+                </a:solidFill>
+                <a:effectLst/>
+                <a:latin typeface="Arial" panose="020B0604020202020204" pitchFamily="34" charset="0"/>
+              </a:rPr>
+              <a:t>Post tapılır:</a:t>
+            </a:r>
+          </a:p>
+          <a:p>
+            <a:pPr marL="742950" lvl="1" indent="-285750">
+              <a:lnSpc>
+                <a:spcPct val="150000"/>
+              </a:lnSpc>
+              <a:buFont typeface="Wingdings" panose="05000000000000000000" pitchFamily="2" charset="2"/>
+              <a:buChar char="q"/>
+            </a:pPr>
+            <a:r>
+              <a:rPr kumimoji="0" lang="en-US" altLang="en-US" sz="1300" b="1" i="0" u="none" strike="noStrike" cap="none" normalizeH="0" baseline="0">
+                <a:ln>
+                  <a:noFill/>
+                </a:ln>
+                <a:solidFill>
+                  <a:schemeClr val="tx1"/>
+                </a:solidFill>
+                <a:effectLst/>
+                <a:latin typeface="Arial" panose="020B0604020202020204" pitchFamily="34" charset="0"/>
+              </a:rPr>
+              <a:t>Post::findOrFail($id) </a:t>
+            </a:r>
+            <a:r>
+              <a:rPr kumimoji="0" lang="en-US" altLang="en-US" sz="1300" b="0" i="0" u="none" strike="noStrike" cap="none" normalizeH="0" baseline="0">
+                <a:ln>
+                  <a:noFill/>
+                </a:ln>
+                <a:solidFill>
+                  <a:schemeClr val="tx1"/>
+                </a:solidFill>
+                <a:effectLst/>
+                <a:latin typeface="Arial" panose="020B0604020202020204" pitchFamily="34" charset="0"/>
+              </a:rPr>
+              <a:t>ilə </a:t>
+            </a:r>
+            <a:r>
+              <a:rPr kumimoji="0" lang="en-US" altLang="en-US" sz="1300" b="1" i="0" u="none" strike="noStrike" cap="none" normalizeH="0" baseline="0">
+                <a:ln>
+                  <a:noFill/>
+                </a:ln>
+                <a:solidFill>
+                  <a:schemeClr val="tx1"/>
+                </a:solidFill>
+                <a:effectLst/>
+                <a:latin typeface="Arial" panose="020B0604020202020204" pitchFamily="34" charset="0"/>
+              </a:rPr>
+              <a:t>posts</a:t>
+            </a:r>
+            <a:r>
+              <a:rPr kumimoji="0" lang="en-US" altLang="en-US" sz="1300" b="0" i="0" u="none" strike="noStrike" cap="none" normalizeH="0" baseline="0">
+                <a:ln>
+                  <a:noFill/>
+                </a:ln>
+                <a:solidFill>
+                  <a:schemeClr val="tx1"/>
+                </a:solidFill>
+                <a:effectLst/>
+                <a:latin typeface="Arial" panose="020B0604020202020204" pitchFamily="34" charset="0"/>
+              </a:rPr>
+              <a:t> cədvəlindən bu </a:t>
+            </a:r>
+            <a:r>
+              <a:rPr kumimoji="0" lang="en-US" altLang="en-US" sz="1300" b="1" i="0" u="none" strike="noStrike" cap="none" normalizeH="0" baseline="0">
+                <a:ln>
+                  <a:noFill/>
+                </a:ln>
+                <a:solidFill>
+                  <a:schemeClr val="tx1"/>
+                </a:solidFill>
+                <a:effectLst/>
+                <a:latin typeface="Arial" panose="020B0604020202020204" pitchFamily="34" charset="0"/>
+              </a:rPr>
+              <a:t>id</a:t>
+            </a:r>
+            <a:r>
+              <a:rPr kumimoji="0" lang="en-US" altLang="en-US" sz="1300" b="0" i="0" u="none" strike="noStrike" cap="none" normalizeH="0" baseline="0">
+                <a:ln>
+                  <a:noFill/>
+                </a:ln>
+                <a:solidFill>
+                  <a:schemeClr val="tx1"/>
+                </a:solidFill>
+                <a:effectLst/>
+                <a:latin typeface="Arial" panose="020B0604020202020204" pitchFamily="34" charset="0"/>
+              </a:rPr>
+              <a:t>-yə uyğun </a:t>
+            </a:r>
+            <a:r>
+              <a:rPr kumimoji="0" lang="en-US" altLang="en-US" sz="1300" b="1" i="0" u="none" strike="noStrike" cap="none" normalizeH="0" baseline="0">
+                <a:ln>
+                  <a:noFill/>
+                </a:ln>
+                <a:solidFill>
+                  <a:schemeClr val="tx1"/>
+                </a:solidFill>
+                <a:effectLst/>
+                <a:latin typeface="Arial" panose="020B0604020202020204" pitchFamily="34" charset="0"/>
+              </a:rPr>
+              <a:t>post</a:t>
+            </a:r>
+            <a:r>
+              <a:rPr kumimoji="0" lang="en-US" altLang="en-US" sz="1300" b="0" i="0" u="none" strike="noStrike" cap="none" normalizeH="0" baseline="0">
+                <a:ln>
+                  <a:noFill/>
+                </a:ln>
+                <a:solidFill>
+                  <a:schemeClr val="tx1"/>
+                </a:solidFill>
+                <a:effectLst/>
+                <a:latin typeface="Arial" panose="020B0604020202020204" pitchFamily="34" charset="0"/>
+              </a:rPr>
+              <a:t> axtarılır.</a:t>
+            </a:r>
+          </a:p>
+          <a:p>
+            <a:pPr marL="742950" lvl="1" indent="-285750">
+              <a:lnSpc>
+                <a:spcPct val="150000"/>
+              </a:lnSpc>
+              <a:buFont typeface="Wingdings" panose="05000000000000000000" pitchFamily="2" charset="2"/>
+              <a:buChar char="q"/>
+            </a:pPr>
+            <a:r>
+              <a:rPr kumimoji="0" lang="en-US" altLang="en-US" sz="1300" b="0" i="0" u="none" strike="noStrike" cap="none" normalizeH="0" baseline="0">
+                <a:ln>
+                  <a:noFill/>
+                </a:ln>
+                <a:solidFill>
+                  <a:schemeClr val="tx1"/>
+                </a:solidFill>
+                <a:effectLst/>
+                <a:latin typeface="Arial" panose="020B0604020202020204" pitchFamily="34" charset="0"/>
+              </a:rPr>
+              <a:t>Əgər tapılmazsa, avtomatik olaraq </a:t>
+            </a:r>
+            <a:r>
+              <a:rPr kumimoji="0" lang="en-US" altLang="en-US" sz="1300" b="1" i="0" u="none" strike="noStrike" cap="none" normalizeH="0" baseline="0">
+                <a:ln>
+                  <a:noFill/>
+                </a:ln>
+                <a:solidFill>
+                  <a:schemeClr val="tx1"/>
+                </a:solidFill>
+                <a:effectLst/>
+                <a:latin typeface="Arial" panose="020B0604020202020204" pitchFamily="34" charset="0"/>
+              </a:rPr>
+              <a:t>404</a:t>
+            </a:r>
+            <a:r>
+              <a:rPr kumimoji="0" lang="en-US" altLang="en-US" sz="1300" b="0" i="0" u="none" strike="noStrike" cap="none" normalizeH="0" baseline="0">
+                <a:ln>
+                  <a:noFill/>
+                </a:ln>
+                <a:solidFill>
+                  <a:schemeClr val="tx1"/>
+                </a:solidFill>
+                <a:effectLst/>
+                <a:latin typeface="Arial" panose="020B0604020202020204" pitchFamily="34" charset="0"/>
+              </a:rPr>
+              <a:t> səhifəsi göstərilir.</a:t>
+            </a:r>
+          </a:p>
+          <a:p>
+            <a:pPr>
+              <a:lnSpc>
+                <a:spcPct val="150000"/>
+              </a:lnSpc>
+              <a:buNone/>
+            </a:pPr>
+            <a:endParaRPr kumimoji="0" lang="en-US" altLang="en-US" sz="1300" b="0" i="0" u="none" strike="noStrike" cap="none" normalizeH="0" baseline="0">
+              <a:ln>
+                <a:noFill/>
+              </a:ln>
+              <a:solidFill>
+                <a:schemeClr val="tx1"/>
+              </a:solidFill>
+              <a:effectLst/>
+              <a:latin typeface="Arial" panose="020B0604020202020204" pitchFamily="34" charset="0"/>
+            </a:endParaRPr>
+          </a:p>
+          <a:p>
+            <a:pPr>
+              <a:lnSpc>
+                <a:spcPct val="150000"/>
+              </a:lnSpc>
+              <a:buNone/>
+            </a:pPr>
+            <a:r>
+              <a:rPr kumimoji="0" lang="en-US" altLang="en-US" sz="1300" b="0" i="0" u="none" strike="noStrike" cap="none" normalizeH="0" baseline="0">
+                <a:ln>
+                  <a:noFill/>
+                </a:ln>
+                <a:solidFill>
+                  <a:schemeClr val="tx1"/>
+                </a:solidFill>
+                <a:effectLst/>
+                <a:latin typeface="Arial" panose="020B0604020202020204" pitchFamily="34" charset="0"/>
+              </a:rPr>
+              <a:t>View göndərir:</a:t>
+            </a:r>
+          </a:p>
+          <a:p>
+            <a:pPr marL="742950" lvl="1" indent="-285750">
+              <a:lnSpc>
+                <a:spcPct val="150000"/>
+              </a:lnSpc>
+              <a:buFont typeface="Wingdings" panose="05000000000000000000" pitchFamily="2" charset="2"/>
+              <a:buChar char="q"/>
+            </a:pPr>
+            <a:r>
+              <a:rPr kumimoji="0" lang="en-US" altLang="en-US" sz="1300" b="0" i="0" u="none" strike="noStrike" cap="none" normalizeH="0" baseline="0">
+                <a:ln>
+                  <a:noFill/>
+                </a:ln>
+                <a:solidFill>
+                  <a:schemeClr val="tx1"/>
+                </a:solidFill>
+                <a:effectLst/>
+                <a:latin typeface="Arial" panose="020B0604020202020204" pitchFamily="34" charset="0"/>
+              </a:rPr>
+              <a:t>Əgər </a:t>
+            </a:r>
+            <a:r>
+              <a:rPr kumimoji="0" lang="en-US" altLang="en-US" sz="1300" b="0" i="1" u="none" strike="noStrike" cap="none" normalizeH="0" baseline="0">
+                <a:ln>
+                  <a:noFill/>
+                </a:ln>
+                <a:solidFill>
+                  <a:schemeClr val="tx1"/>
+                </a:solidFill>
+                <a:effectLst/>
+                <a:latin typeface="Arial" panose="020B0604020202020204" pitchFamily="34" charset="0"/>
+              </a:rPr>
+              <a:t>post</a:t>
+            </a:r>
+            <a:r>
+              <a:rPr kumimoji="0" lang="en-US" altLang="en-US" sz="1300" b="0" i="0" u="none" strike="noStrike" cap="none" normalizeH="0" baseline="0">
+                <a:ln>
+                  <a:noFill/>
+                </a:ln>
+                <a:solidFill>
+                  <a:schemeClr val="tx1"/>
+                </a:solidFill>
+                <a:effectLst/>
+                <a:latin typeface="Arial" panose="020B0604020202020204" pitchFamily="34" charset="0"/>
+              </a:rPr>
+              <a:t> tapılarsa, </a:t>
+            </a:r>
+            <a:r>
+              <a:rPr kumimoji="0" lang="en-US" altLang="en-US" sz="1300" b="1" i="0" u="none" strike="noStrike" cap="none" normalizeH="0" baseline="0">
+                <a:ln>
+                  <a:noFill/>
+                </a:ln>
+                <a:solidFill>
+                  <a:schemeClr val="tx1"/>
+                </a:solidFill>
+                <a:effectLst/>
+                <a:latin typeface="Arial" panose="020B0604020202020204" pitchFamily="34" charset="0"/>
+              </a:rPr>
+              <a:t>edit.blade.php </a:t>
+            </a:r>
+            <a:r>
+              <a:rPr kumimoji="0" lang="en-US" altLang="en-US" sz="1300" b="0" i="0" u="none" strike="noStrike" cap="none" normalizeH="0" baseline="0">
+                <a:ln>
+                  <a:noFill/>
+                </a:ln>
+                <a:solidFill>
+                  <a:schemeClr val="tx1"/>
+                </a:solidFill>
+                <a:effectLst/>
+                <a:latin typeface="Arial" panose="020B0604020202020204" pitchFamily="34" charset="0"/>
+              </a:rPr>
+              <a:t>adlı görünüş (</a:t>
+            </a:r>
+            <a:r>
+              <a:rPr kumimoji="0" lang="en-US" altLang="en-US" sz="1300" b="1" i="0" u="none" strike="noStrike" cap="none" normalizeH="0" baseline="0">
+                <a:ln>
+                  <a:noFill/>
+                </a:ln>
+                <a:solidFill>
+                  <a:schemeClr val="tx1"/>
+                </a:solidFill>
+                <a:effectLst/>
+                <a:latin typeface="Arial" panose="020B0604020202020204" pitchFamily="34" charset="0"/>
+              </a:rPr>
+              <a:t>view</a:t>
+            </a:r>
+            <a:r>
+              <a:rPr kumimoji="0" lang="en-US" altLang="en-US" sz="1300" b="0" i="0" u="none" strike="noStrike" cap="none" normalizeH="0" baseline="0">
+                <a:ln>
+                  <a:noFill/>
+                </a:ln>
+                <a:solidFill>
+                  <a:schemeClr val="tx1"/>
+                </a:solidFill>
+                <a:effectLst/>
+                <a:latin typeface="Arial" panose="020B0604020202020204" pitchFamily="34" charset="0"/>
+              </a:rPr>
+              <a:t>) faylına </a:t>
+            </a:r>
+            <a:r>
+              <a:rPr kumimoji="0" lang="en-US" altLang="en-US" sz="1300" b="1" i="0" u="none" strike="noStrike" cap="none" normalizeH="0" baseline="0">
+                <a:ln>
+                  <a:noFill/>
+                </a:ln>
+                <a:solidFill>
+                  <a:schemeClr val="tx1"/>
+                </a:solidFill>
+                <a:effectLst/>
+                <a:latin typeface="Arial" panose="020B0604020202020204" pitchFamily="34" charset="0"/>
+              </a:rPr>
+              <a:t>$post </a:t>
+            </a:r>
+            <a:r>
+              <a:rPr kumimoji="0" lang="en-US" altLang="en-US" sz="1300" b="0" i="0" u="none" strike="noStrike" cap="none" normalizeH="0" baseline="0">
+                <a:ln>
+                  <a:noFill/>
+                </a:ln>
+                <a:solidFill>
+                  <a:schemeClr val="tx1"/>
+                </a:solidFill>
+                <a:effectLst/>
+                <a:latin typeface="Arial" panose="020B0604020202020204" pitchFamily="34" charset="0"/>
+              </a:rPr>
+              <a:t>dəyişəni ötürülür.</a:t>
+            </a:r>
+          </a:p>
+          <a:p>
+            <a:pPr marL="742950" lvl="1" indent="-285750">
+              <a:lnSpc>
+                <a:spcPct val="150000"/>
+              </a:lnSpc>
+              <a:buFont typeface="Wingdings" panose="05000000000000000000" pitchFamily="2" charset="2"/>
+              <a:buChar char="q"/>
+            </a:pPr>
+            <a:r>
+              <a:rPr kumimoji="0" lang="en-US" altLang="en-US" sz="1300" b="1" i="0" u="none" strike="noStrike" cap="none" normalizeH="0" baseline="0">
+                <a:ln>
+                  <a:noFill/>
+                </a:ln>
+                <a:solidFill>
+                  <a:schemeClr val="tx1"/>
+                </a:solidFill>
+                <a:effectLst/>
+                <a:latin typeface="Arial" panose="020B0604020202020204" pitchFamily="34" charset="0"/>
+              </a:rPr>
+              <a:t>compact('post') </a:t>
+            </a:r>
+            <a:r>
+              <a:rPr kumimoji="0" lang="en-US" altLang="en-US" sz="1300" b="0" i="0" u="none" strike="noStrike" cap="none" normalizeH="0" baseline="0">
+                <a:ln>
+                  <a:noFill/>
+                </a:ln>
+                <a:solidFill>
+                  <a:schemeClr val="tx1"/>
+                </a:solidFill>
+                <a:effectLst/>
+                <a:latin typeface="Arial" panose="020B0604020202020204" pitchFamily="34" charset="0"/>
+              </a:rPr>
+              <a:t>funksiyası </a:t>
+            </a:r>
+            <a:r>
+              <a:rPr kumimoji="0" lang="en-US" altLang="en-US" sz="1300" b="1" i="0" u="none" strike="noStrike" cap="none" normalizeH="0" baseline="0">
+                <a:ln>
+                  <a:noFill/>
+                </a:ln>
+                <a:solidFill>
+                  <a:schemeClr val="tx1"/>
+                </a:solidFill>
+                <a:effectLst/>
+                <a:latin typeface="Arial" panose="020B0604020202020204" pitchFamily="34" charset="0"/>
+              </a:rPr>
+              <a:t>$post </a:t>
+            </a:r>
+            <a:r>
+              <a:rPr kumimoji="0" lang="en-US" altLang="en-US" sz="1300" b="0" i="0" u="none" strike="noStrike" cap="none" normalizeH="0" baseline="0">
+                <a:ln>
+                  <a:noFill/>
+                </a:ln>
+                <a:solidFill>
+                  <a:schemeClr val="tx1"/>
+                </a:solidFill>
+                <a:effectLst/>
+                <a:latin typeface="Arial" panose="020B0604020202020204" pitchFamily="34" charset="0"/>
+              </a:rPr>
+              <a:t>dəyişənini həmin </a:t>
+            </a:r>
+            <a:r>
+              <a:rPr kumimoji="0" lang="en-US" altLang="en-US" sz="1300" b="1" i="0" u="none" strike="noStrike" cap="none" normalizeH="0" baseline="0">
+                <a:ln>
+                  <a:noFill/>
+                </a:ln>
+                <a:solidFill>
+                  <a:schemeClr val="tx1"/>
+                </a:solidFill>
+                <a:effectLst/>
+                <a:latin typeface="Arial" panose="020B0604020202020204" pitchFamily="34" charset="0"/>
+              </a:rPr>
+              <a:t>view</a:t>
+            </a:r>
+            <a:r>
+              <a:rPr kumimoji="0" lang="en-US" altLang="en-US" sz="1300" b="0" i="0" u="none" strike="noStrike" cap="none" normalizeH="0" baseline="0">
+                <a:ln>
+                  <a:noFill/>
+                </a:ln>
+                <a:solidFill>
+                  <a:schemeClr val="tx1"/>
+                </a:solidFill>
+                <a:effectLst/>
+                <a:latin typeface="Arial" panose="020B0604020202020204" pitchFamily="34" charset="0"/>
+              </a:rPr>
+              <a:t>-</a:t>
+            </a:r>
+            <a:r>
+              <a:rPr kumimoji="0" lang="az-Latn-AZ" altLang="en-US" sz="1300" b="0" i="0" u="none" strike="noStrike" cap="none" normalizeH="0" baseline="0">
+                <a:ln>
+                  <a:noFill/>
+                </a:ln>
+                <a:solidFill>
+                  <a:schemeClr val="tx1"/>
+                </a:solidFill>
+                <a:effectLst/>
+                <a:latin typeface="Arial" panose="020B0604020202020204" pitchFamily="34" charset="0"/>
+              </a:rPr>
+              <a:t>a</a:t>
+            </a:r>
+            <a:r>
+              <a:rPr kumimoji="0" lang="en-US" altLang="en-US" sz="1300" b="0" i="0" u="none" strike="noStrike" cap="none" normalizeH="0" baseline="0">
+                <a:ln>
+                  <a:noFill/>
+                </a:ln>
+                <a:solidFill>
+                  <a:schemeClr val="tx1"/>
+                </a:solidFill>
+                <a:effectLst/>
+                <a:latin typeface="Arial" panose="020B0604020202020204" pitchFamily="34" charset="0"/>
+              </a:rPr>
+              <a:t> göndərmək üçün qısayoldur.</a:t>
+            </a:r>
+            <a:endParaRPr kumimoji="0" lang="az-Latn-AZ" altLang="en-US" sz="1300" b="0" i="0" u="none" strike="noStrike" cap="none" normalizeH="0" baseline="0">
+              <a:ln>
+                <a:noFill/>
+              </a:ln>
+              <a:solidFill>
+                <a:schemeClr val="tx1"/>
+              </a:solidFill>
+              <a:effectLst/>
+              <a:latin typeface="Arial" panose="020B0604020202020204" pitchFamily="34" charset="0"/>
+            </a:endParaRPr>
+          </a:p>
+          <a:p>
+            <a:pPr marL="285750" indent="-285750">
+              <a:lnSpc>
+                <a:spcPct val="150000"/>
+              </a:lnSpc>
+              <a:buFont typeface="Wingdings" panose="05000000000000000000" pitchFamily="2" charset="2"/>
+              <a:buChar char="q"/>
+            </a:pPr>
+            <a:endParaRPr lang="az-Latn-AZ" altLang="en-US" sz="1300">
+              <a:latin typeface="Arial" panose="020B0604020202020204" pitchFamily="34" charset="0"/>
+            </a:endParaRPr>
+          </a:p>
+          <a:p>
+            <a:pPr marL="285750" indent="-285750">
+              <a:lnSpc>
+                <a:spcPct val="150000"/>
+              </a:lnSpc>
+              <a:buFont typeface="Wingdings" panose="05000000000000000000" pitchFamily="2" charset="2"/>
+              <a:buChar char="q"/>
+            </a:pPr>
+            <a:endParaRPr kumimoji="0" lang="en-US" altLang="en-US" sz="1300" b="0" i="0" u="none" strike="noStrike" cap="none" normalizeH="0" baseline="0">
+              <a:ln>
+                <a:noFill/>
+              </a:ln>
+              <a:solidFill>
+                <a:schemeClr val="tx1"/>
+              </a:solidFill>
+              <a:effectLst/>
+              <a:latin typeface="Arial" panose="020B0604020202020204" pitchFamily="34" charset="0"/>
+            </a:endParaRPr>
+          </a:p>
+        </p:txBody>
+      </p:sp>
+      <p:pic>
+        <p:nvPicPr>
+          <p:cNvPr id="4" name="Picture 3">
+            <a:extLst>
+              <a:ext uri="{FF2B5EF4-FFF2-40B4-BE49-F238E27FC236}">
+                <a16:creationId xmlns:a16="http://schemas.microsoft.com/office/drawing/2014/main" id="{8919BB49-BE59-493C-B13F-2CBF9ED2416A}"/>
+              </a:ext>
+            </a:extLst>
+          </p:cNvPr>
+          <p:cNvPicPr>
+            <a:picLocks noChangeAspect="1"/>
+          </p:cNvPicPr>
+          <p:nvPr/>
+        </p:nvPicPr>
+        <p:blipFill>
+          <a:blip r:embed="rId2"/>
+          <a:stretch>
+            <a:fillRect/>
+          </a:stretch>
+        </p:blipFill>
+        <p:spPr>
+          <a:xfrm>
+            <a:off x="0" y="891440"/>
+            <a:ext cx="3696216" cy="1219370"/>
+          </a:xfrm>
+          <a:prstGeom prst="rect">
+            <a:avLst/>
+          </a:prstGeom>
+        </p:spPr>
+      </p:pic>
+    </p:spTree>
+    <p:extLst>
+      <p:ext uri="{BB962C8B-B14F-4D97-AF65-F5344CB8AC3E}">
+        <p14:creationId xmlns:p14="http://schemas.microsoft.com/office/powerpoint/2010/main" val="586294476"/>
+      </p:ext>
+    </p:extLst>
+  </p:cSld>
+  <p:clrMapOvr>
+    <a:masterClrMapping/>
+  </p:clrMapOvr>
+</p:sld>
+</file>
+
+<file path=ppt/slides/slide5.xml><?xml version="1.0" encoding="utf-8"?>
+<p:sld xmlns:a="http://schemas.openxmlformats.org/drawingml/2006/main" xmlns:r="http://schemas.openxmlformats.org/officeDocument/2006/relationships" xmlns:p="http://schemas.openxmlformats.org/presentationml/2006/main">
+  <p:cSld>
+    <p:spTree>
+      <p:nvGrpSpPr>
+        <p:cNvPr id="1" name="">
+          <a:extLst>
+            <a:ext uri="{FF2B5EF4-FFF2-40B4-BE49-F238E27FC236}">
+              <a16:creationId xmlns:a16="http://schemas.microsoft.com/office/drawing/2014/main" id="{044A82AD-63B5-B424-C6C8-4219AA640AE4}"/>
+            </a:ext>
+          </a:extLst>
+        </p:cNvPr>
+        <p:cNvGrpSpPr/>
+        <p:nvPr/>
+      </p:nvGrpSpPr>
+      <p:grpSpPr>
+        <a:xfrm>
+          <a:off x="0" y="0"/>
+          <a:ext cx="0" cy="0"/>
+          <a:chOff x="0" y="0"/>
+          <a:chExt cx="0" cy="0"/>
+        </a:xfrm>
+      </p:grpSpPr>
+      <p:sp>
+        <p:nvSpPr>
+          <p:cNvPr id="3" name="TextBox 2">
+            <a:extLst>
+              <a:ext uri="{FF2B5EF4-FFF2-40B4-BE49-F238E27FC236}">
+                <a16:creationId xmlns:a16="http://schemas.microsoft.com/office/drawing/2014/main" id="{21756F2F-06A3-73E7-5F5A-7432FEFA50C1}"/>
+              </a:ext>
+            </a:extLst>
+          </p:cNvPr>
+          <p:cNvSpPr txBox="1"/>
+          <p:nvPr/>
+        </p:nvSpPr>
+        <p:spPr>
+          <a:xfrm>
+            <a:off x="217714" y="255046"/>
+            <a:ext cx="11756571" cy="3956339"/>
+          </a:xfrm>
+          <a:prstGeom prst="rect">
+            <a:avLst/>
+          </a:prstGeom>
+          <a:noFill/>
+        </p:spPr>
+        <p:txBody>
+          <a:bodyPr wrap="square">
+            <a:spAutoFit/>
+          </a:bodyPr>
+          <a:lstStyle/>
+          <a:p>
+            <a:pPr>
+              <a:lnSpc>
+                <a:spcPct val="150000"/>
+              </a:lnSpc>
+              <a:buNone/>
+            </a:pPr>
+            <a:r>
+              <a:rPr kumimoji="0" lang="en-US" altLang="en-US" sz="1300" b="1" i="0" u="none" strike="noStrike" cap="none" normalizeH="0" baseline="0">
+                <a:ln>
+                  <a:noFill/>
+                </a:ln>
+                <a:solidFill>
+                  <a:schemeClr val="tx1"/>
+                </a:solidFill>
+                <a:effectLst/>
+                <a:latin typeface="Arial" panose="020B0604020202020204" pitchFamily="34" charset="0"/>
+              </a:rPr>
+              <a:t>Nəticə olaraq ümumi izah</a:t>
+            </a:r>
+            <a:r>
+              <a:rPr kumimoji="0" lang="en-US" altLang="en-US" sz="1300" b="0" i="0" u="none" strike="noStrike" cap="none" normalizeH="0" baseline="0">
+                <a:ln>
+                  <a:noFill/>
+                </a:ln>
+                <a:solidFill>
+                  <a:schemeClr val="tx1"/>
+                </a:solidFill>
+                <a:effectLst/>
+                <a:latin typeface="Arial" panose="020B0604020202020204" pitchFamily="34" charset="0"/>
+              </a:rPr>
+              <a:t>:</a:t>
+            </a:r>
+            <a:endParaRPr lang="az-Latn-AZ" altLang="en-US" sz="1300">
+              <a:latin typeface="Arial" panose="020B0604020202020204" pitchFamily="34" charset="0"/>
+            </a:endParaRPr>
+          </a:p>
+          <a:p>
+            <a:pPr marL="742950" lvl="1" indent="-285750">
+              <a:lnSpc>
+                <a:spcPct val="150000"/>
+              </a:lnSpc>
+              <a:buFont typeface="Wingdings" panose="05000000000000000000" pitchFamily="2" charset="2"/>
+              <a:buChar char="q"/>
+            </a:pPr>
+            <a:r>
+              <a:rPr kumimoji="0" lang="en-US" altLang="en-US" sz="1300" b="0" i="0" u="none" strike="noStrike" cap="none" normalizeH="0" baseline="0">
+                <a:ln>
+                  <a:noFill/>
+                </a:ln>
+                <a:solidFill>
+                  <a:schemeClr val="tx1"/>
+                </a:solidFill>
+                <a:effectLst/>
+                <a:latin typeface="Arial" panose="020B0604020202020204" pitchFamily="34" charset="0"/>
+              </a:rPr>
+              <a:t>Hər post üçün </a:t>
+            </a:r>
+            <a:r>
+              <a:rPr kumimoji="0" lang="en-US" altLang="en-US" sz="1300" b="1" i="0" u="none" strike="noStrike" cap="none" normalizeH="0" baseline="0">
+                <a:ln>
+                  <a:noFill/>
+                </a:ln>
+                <a:solidFill>
+                  <a:schemeClr val="tx1"/>
+                </a:solidFill>
+                <a:effectLst/>
+                <a:latin typeface="Arial" panose="020B0604020202020204" pitchFamily="34" charset="0"/>
+              </a:rPr>
+              <a:t>Edit</a:t>
+            </a:r>
+            <a:r>
+              <a:rPr kumimoji="0" lang="en-US" altLang="en-US" sz="1300" b="0" i="0" u="none" strike="noStrike" cap="none" normalizeH="0" baseline="0">
+                <a:ln>
+                  <a:noFill/>
+                </a:ln>
+                <a:solidFill>
+                  <a:schemeClr val="tx1"/>
+                </a:solidFill>
+                <a:effectLst/>
+                <a:latin typeface="Arial" panose="020B0604020202020204" pitchFamily="34" charset="0"/>
+              </a:rPr>
+              <a:t> düyməsinə klik etdikdə </a:t>
+            </a:r>
+            <a:r>
+              <a:rPr kumimoji="0" lang="en-US" altLang="en-US" sz="1300" b="1" i="0" u="none" strike="noStrike" cap="none" normalizeH="0" baseline="0">
+                <a:ln>
+                  <a:noFill/>
+                </a:ln>
+                <a:solidFill>
+                  <a:schemeClr val="tx1"/>
+                </a:solidFill>
+                <a:effectLst/>
+                <a:latin typeface="Arial" panose="020B0604020202020204" pitchFamily="34" charset="0"/>
+              </a:rPr>
+              <a:t>posts/{id}/edit </a:t>
+            </a:r>
+            <a:r>
+              <a:rPr kumimoji="0" lang="en-US" altLang="en-US" sz="1300" b="0" i="0" u="none" strike="noStrike" cap="none" normalizeH="0" baseline="0">
+                <a:ln>
+                  <a:noFill/>
+                </a:ln>
+                <a:solidFill>
+                  <a:schemeClr val="tx1"/>
+                </a:solidFill>
+                <a:effectLst/>
+                <a:latin typeface="Arial" panose="020B0604020202020204" pitchFamily="34" charset="0"/>
+              </a:rPr>
+              <a:t>kimi bir linkə gedilir.</a:t>
+            </a:r>
+          </a:p>
+          <a:p>
+            <a:pPr marL="742950" lvl="1" indent="-285750">
+              <a:lnSpc>
+                <a:spcPct val="150000"/>
+              </a:lnSpc>
+              <a:buFont typeface="Wingdings" panose="05000000000000000000" pitchFamily="2" charset="2"/>
+              <a:buChar char="q"/>
+            </a:pPr>
+            <a:r>
+              <a:rPr kumimoji="0" lang="en-US" altLang="en-US" sz="1300" b="0" i="0" u="none" strike="noStrike" cap="none" normalizeH="0" baseline="0">
+                <a:ln>
+                  <a:noFill/>
+                </a:ln>
+                <a:solidFill>
+                  <a:schemeClr val="tx1"/>
+                </a:solidFill>
+                <a:effectLst/>
+                <a:latin typeface="Arial" panose="020B0604020202020204" pitchFamily="34" charset="0"/>
+              </a:rPr>
+              <a:t>Bu link Laravel-in </a:t>
+            </a:r>
+            <a:r>
+              <a:rPr kumimoji="0" lang="en-US" altLang="en-US" sz="1300" b="1" i="0" u="none" strike="noStrike" cap="none" normalizeH="0" baseline="0">
+                <a:ln>
+                  <a:noFill/>
+                </a:ln>
+                <a:solidFill>
+                  <a:schemeClr val="tx1"/>
+                </a:solidFill>
+                <a:effectLst/>
+                <a:latin typeface="Arial" panose="020B0604020202020204" pitchFamily="34" charset="0"/>
+              </a:rPr>
+              <a:t>routeları</a:t>
+            </a:r>
+            <a:r>
+              <a:rPr kumimoji="0" lang="en-US" altLang="en-US" sz="1300" b="0" i="0" u="none" strike="noStrike" cap="none" normalizeH="0" baseline="0">
+                <a:ln>
+                  <a:noFill/>
+                </a:ln>
+                <a:solidFill>
+                  <a:schemeClr val="tx1"/>
+                </a:solidFill>
+                <a:effectLst/>
+                <a:latin typeface="Arial" panose="020B0604020202020204" pitchFamily="34" charset="0"/>
+              </a:rPr>
+              <a:t> vasitəsilə </a:t>
+            </a:r>
+            <a:r>
+              <a:rPr kumimoji="0" lang="en-US" altLang="en-US" sz="1300" b="1" i="0" u="none" strike="noStrike" cap="none" normalizeH="0" baseline="0">
+                <a:ln>
+                  <a:noFill/>
+                </a:ln>
+                <a:solidFill>
+                  <a:schemeClr val="tx1"/>
+                </a:solidFill>
+                <a:effectLst/>
+                <a:latin typeface="Arial" panose="020B0604020202020204" pitchFamily="34" charset="0"/>
+              </a:rPr>
+              <a:t>PostController-dəki</a:t>
+            </a:r>
+            <a:r>
+              <a:rPr kumimoji="0" lang="en-US" altLang="en-US" sz="1300" b="0" i="0" u="none" strike="noStrike" cap="none" normalizeH="0" baseline="0">
+                <a:ln>
+                  <a:noFill/>
+                </a:ln>
+                <a:solidFill>
+                  <a:schemeClr val="tx1"/>
+                </a:solidFill>
+                <a:effectLst/>
+                <a:latin typeface="Arial" panose="020B0604020202020204" pitchFamily="34" charset="0"/>
+              </a:rPr>
+              <a:t> </a:t>
+            </a:r>
+            <a:r>
+              <a:rPr kumimoji="0" lang="en-US" altLang="en-US" sz="1300" b="1" i="0" u="none" strike="noStrike" cap="none" normalizeH="0" baseline="0">
+                <a:ln>
+                  <a:noFill/>
+                </a:ln>
+                <a:solidFill>
+                  <a:schemeClr val="tx1"/>
+                </a:solidFill>
+                <a:effectLst/>
+                <a:latin typeface="Arial" panose="020B0604020202020204" pitchFamily="34" charset="0"/>
+              </a:rPr>
+              <a:t>edit() </a:t>
+            </a:r>
+            <a:r>
+              <a:rPr kumimoji="0" lang="en-US" altLang="en-US" sz="1300" b="0" i="0" u="none" strike="noStrike" cap="none" normalizeH="0" baseline="0">
+                <a:ln>
+                  <a:noFill/>
+                </a:ln>
+                <a:solidFill>
+                  <a:schemeClr val="tx1"/>
+                </a:solidFill>
+                <a:effectLst/>
+                <a:latin typeface="Arial" panose="020B0604020202020204" pitchFamily="34" charset="0"/>
+              </a:rPr>
+              <a:t>metodunu çağırır.</a:t>
+            </a:r>
+          </a:p>
+          <a:p>
+            <a:pPr marL="742950" lvl="1" indent="-285750">
+              <a:lnSpc>
+                <a:spcPct val="150000"/>
+              </a:lnSpc>
+              <a:buFont typeface="Wingdings" panose="05000000000000000000" pitchFamily="2" charset="2"/>
+              <a:buChar char="q"/>
+            </a:pPr>
+            <a:r>
+              <a:rPr kumimoji="0" lang="en-US" altLang="en-US" sz="1300" b="0" i="0" u="none" strike="noStrike" cap="none" normalizeH="0" baseline="0">
+                <a:ln>
+                  <a:noFill/>
+                </a:ln>
+                <a:solidFill>
+                  <a:schemeClr val="tx1"/>
+                </a:solidFill>
+                <a:effectLst/>
+                <a:latin typeface="Arial" panose="020B0604020202020204" pitchFamily="34" charset="0"/>
+              </a:rPr>
+              <a:t>Bu metod bazadan uyğun </a:t>
+            </a:r>
+            <a:r>
+              <a:rPr kumimoji="0" lang="en-US" altLang="en-US" sz="1300" b="1" i="0" u="none" strike="noStrike" cap="none" normalizeH="0" baseline="0">
+                <a:ln>
+                  <a:noFill/>
+                </a:ln>
+                <a:solidFill>
+                  <a:schemeClr val="tx1"/>
+                </a:solidFill>
+                <a:effectLst/>
+                <a:latin typeface="Arial" panose="020B0604020202020204" pitchFamily="34" charset="0"/>
+              </a:rPr>
+              <a:t>postu</a:t>
+            </a:r>
+            <a:r>
+              <a:rPr kumimoji="0" lang="en-US" altLang="en-US" sz="1300" b="0" i="0" u="none" strike="noStrike" cap="none" normalizeH="0" baseline="0">
+                <a:ln>
+                  <a:noFill/>
+                </a:ln>
+                <a:solidFill>
+                  <a:schemeClr val="tx1"/>
+                </a:solidFill>
+                <a:effectLst/>
+                <a:latin typeface="Arial" panose="020B0604020202020204" pitchFamily="34" charset="0"/>
+              </a:rPr>
+              <a:t> tapır və onu redaktə etmək üçün </a:t>
+            </a:r>
+            <a:r>
+              <a:rPr kumimoji="0" lang="en-US" altLang="en-US" sz="1300" b="1" i="0" u="none" strike="noStrike" cap="none" normalizeH="0" baseline="0">
+                <a:ln>
+                  <a:noFill/>
+                </a:ln>
+                <a:solidFill>
+                  <a:schemeClr val="tx1"/>
+                </a:solidFill>
+                <a:effectLst/>
+                <a:latin typeface="Arial" panose="020B0604020202020204" pitchFamily="34" charset="0"/>
+              </a:rPr>
+              <a:t>edit</a:t>
+            </a:r>
+            <a:r>
+              <a:rPr kumimoji="0" lang="en-US" altLang="en-US" sz="1300" b="0" i="0" u="none" strike="noStrike" cap="none" normalizeH="0" baseline="0">
+                <a:ln>
+                  <a:noFill/>
+                </a:ln>
+                <a:solidFill>
+                  <a:schemeClr val="tx1"/>
+                </a:solidFill>
+                <a:effectLst/>
+                <a:latin typeface="Arial" panose="020B0604020202020204" pitchFamily="34" charset="0"/>
+              </a:rPr>
+              <a:t> görünüş faylına ötürür.</a:t>
+            </a:r>
+            <a:endParaRPr kumimoji="0" lang="az-Latn-AZ" altLang="en-US" sz="1300" b="0" i="0" u="none" strike="noStrike" cap="none" normalizeH="0" baseline="0">
+              <a:ln>
+                <a:noFill/>
+              </a:ln>
+              <a:solidFill>
+                <a:schemeClr val="tx1"/>
+              </a:solidFill>
+              <a:effectLst/>
+              <a:latin typeface="Arial" panose="020B0604020202020204" pitchFamily="34" charset="0"/>
+            </a:endParaRPr>
+          </a:p>
+          <a:p>
+            <a:pPr>
+              <a:lnSpc>
+                <a:spcPct val="150000"/>
+              </a:lnSpc>
+              <a:buNone/>
+            </a:pPr>
+            <a:endParaRPr lang="az-Latn-AZ" altLang="en-US" sz="1300">
+              <a:latin typeface="Arial" panose="020B0604020202020204" pitchFamily="34" charset="0"/>
+            </a:endParaRPr>
+          </a:p>
+          <a:p>
+            <a:pPr>
+              <a:lnSpc>
+                <a:spcPct val="150000"/>
+              </a:lnSpc>
+              <a:buNone/>
+            </a:pPr>
+            <a:endParaRPr kumimoji="0" lang="az-Latn-AZ" altLang="en-US" sz="1300" b="0" i="0" u="none" strike="noStrike" cap="none" normalizeH="0" baseline="0">
+              <a:ln>
+                <a:noFill/>
+              </a:ln>
+              <a:solidFill>
+                <a:schemeClr val="tx1"/>
+              </a:solidFill>
+              <a:effectLst/>
+              <a:latin typeface="Arial" panose="020B0604020202020204" pitchFamily="34" charset="0"/>
+            </a:endParaRPr>
+          </a:p>
+          <a:p>
+            <a:pPr>
+              <a:lnSpc>
+                <a:spcPct val="150000"/>
+              </a:lnSpc>
+              <a:buNone/>
+            </a:pPr>
+            <a:endParaRPr lang="az-Latn-AZ" altLang="en-US" sz="1300">
+              <a:latin typeface="Arial" panose="020B0604020202020204" pitchFamily="34" charset="0"/>
+            </a:endParaRPr>
+          </a:p>
+          <a:p>
+            <a:pPr>
+              <a:lnSpc>
+                <a:spcPct val="150000"/>
+              </a:lnSpc>
+              <a:buNone/>
+            </a:pPr>
+            <a:endParaRPr kumimoji="0" lang="az-Latn-AZ" altLang="en-US" sz="1300" b="0" i="0" u="none" strike="noStrike" cap="none" normalizeH="0" baseline="0">
+              <a:ln>
+                <a:noFill/>
+              </a:ln>
+              <a:solidFill>
+                <a:schemeClr val="tx1"/>
+              </a:solidFill>
+              <a:effectLst/>
+              <a:latin typeface="Arial" panose="020B0604020202020204" pitchFamily="34" charset="0"/>
+            </a:endParaRPr>
+          </a:p>
+          <a:p>
+            <a:pPr>
+              <a:lnSpc>
+                <a:spcPct val="150000"/>
+              </a:lnSpc>
+              <a:buNone/>
+            </a:pPr>
+            <a:endParaRPr kumimoji="0" lang="az-Latn-AZ" altLang="en-US" sz="1300" b="0" i="0" u="none" strike="noStrike" cap="none" normalizeH="0" baseline="0">
+              <a:ln>
+                <a:noFill/>
+              </a:ln>
+              <a:solidFill>
+                <a:schemeClr val="tx1"/>
+              </a:solidFill>
+              <a:effectLst/>
+              <a:latin typeface="Arial" panose="020B0604020202020204" pitchFamily="34" charset="0"/>
+            </a:endParaRPr>
+          </a:p>
+          <a:p>
+            <a:pPr>
+              <a:lnSpc>
+                <a:spcPct val="150000"/>
+              </a:lnSpc>
+              <a:buNone/>
+            </a:pPr>
+            <a:r>
+              <a:rPr lang="az-Latn-AZ" altLang="en-US" sz="1300" b="1">
+                <a:solidFill>
+                  <a:srgbClr val="FF0000"/>
+                </a:solidFill>
+                <a:latin typeface="Arial" panose="020B0604020202020204" pitchFamily="34" charset="0"/>
+              </a:rPr>
+              <a:t>NOT:</a:t>
+            </a:r>
+            <a:r>
+              <a:rPr lang="az-Latn-AZ" altLang="en-US" sz="1300" b="1">
+                <a:solidFill>
+                  <a:schemeClr val="accent4"/>
+                </a:solidFill>
+                <a:latin typeface="Arial" panose="020B0604020202020204" pitchFamily="34" charset="0"/>
+              </a:rPr>
+              <a:t> Bu atılan addımlar sadəcə </a:t>
+            </a:r>
+            <a:r>
+              <a:rPr lang="az-Latn-AZ" altLang="en-US" sz="1300" b="1">
+                <a:solidFill>
+                  <a:srgbClr val="FF0000"/>
+                </a:solidFill>
+                <a:latin typeface="Arial" panose="020B0604020202020204" pitchFamily="34" charset="0"/>
+              </a:rPr>
+              <a:t>EDİT</a:t>
+            </a:r>
+            <a:r>
+              <a:rPr lang="az-Latn-AZ" altLang="en-US" sz="1300" b="1">
+                <a:solidFill>
+                  <a:schemeClr val="accent4"/>
+                </a:solidFill>
+                <a:latin typeface="Arial" panose="020B0604020202020204" pitchFamily="34" charset="0"/>
+              </a:rPr>
+              <a:t> şablonunu açmaq üçün. </a:t>
+            </a:r>
+            <a:r>
+              <a:rPr lang="az-Latn-AZ" altLang="en-US" sz="1300" b="1">
+                <a:solidFill>
+                  <a:srgbClr val="FF0000"/>
+                </a:solidFill>
+                <a:latin typeface="Arial" panose="020B0604020202020204" pitchFamily="34" charset="0"/>
+              </a:rPr>
+              <a:t>Edit</a:t>
+            </a:r>
+            <a:r>
+              <a:rPr lang="az-Latn-AZ" altLang="en-US" sz="1300" b="1">
+                <a:solidFill>
+                  <a:schemeClr val="accent4"/>
+                </a:solidFill>
+                <a:latin typeface="Arial" panose="020B0604020202020204" pitchFamily="34" charset="0"/>
+              </a:rPr>
+              <a:t> şablonu açıldıqdan sonra nələrisə dəyişərək həmin dəyişiklikləri yadda saxlamaq üçün </a:t>
+            </a:r>
+            <a:r>
+              <a:rPr lang="az-Latn-AZ" altLang="en-US" sz="1300" b="1">
+                <a:solidFill>
+                  <a:srgbClr val="FF0000"/>
+                </a:solidFill>
+                <a:latin typeface="Arial" panose="020B0604020202020204" pitchFamily="34" charset="0"/>
+              </a:rPr>
+              <a:t>UPDATE() </a:t>
+            </a:r>
+            <a:r>
+              <a:rPr lang="az-Latn-AZ" altLang="en-US" sz="1300" b="1">
+                <a:solidFill>
+                  <a:schemeClr val="accent4"/>
+                </a:solidFill>
+                <a:latin typeface="Arial" panose="020B0604020202020204" pitchFamily="34" charset="0"/>
+              </a:rPr>
+              <a:t>funksiyasından istifadə edəcəyik.</a:t>
+            </a:r>
+            <a:endParaRPr kumimoji="0" lang="az-Latn-AZ" altLang="en-US" sz="1300" b="1" i="0" u="none" strike="noStrike" cap="none" normalizeH="0" baseline="0">
+              <a:ln>
+                <a:noFill/>
+              </a:ln>
+              <a:solidFill>
+                <a:schemeClr val="accent4"/>
+              </a:solidFill>
+              <a:effectLst/>
+              <a:latin typeface="Arial" panose="020B0604020202020204" pitchFamily="34" charset="0"/>
+            </a:endParaRPr>
+          </a:p>
+          <a:p>
+            <a:pPr>
+              <a:lnSpc>
+                <a:spcPct val="150000"/>
+              </a:lnSpc>
+              <a:buNone/>
+            </a:pPr>
+            <a:endParaRPr lang="az-Latn-AZ" altLang="en-US" sz="1300">
+              <a:latin typeface="Arial" panose="020B0604020202020204" pitchFamily="34" charset="0"/>
+            </a:endParaRPr>
+          </a:p>
+          <a:p>
+            <a:pPr>
+              <a:lnSpc>
+                <a:spcPct val="150000"/>
+              </a:lnSpc>
+              <a:buNone/>
+            </a:pPr>
+            <a:endParaRPr kumimoji="0" lang="en-US" altLang="en-US" sz="1300" b="0" i="0" u="none" strike="noStrike" cap="none" normalizeH="0" baseline="0">
+              <a:ln>
+                <a:noFill/>
+              </a:ln>
+              <a:solidFill>
+                <a:schemeClr val="tx1"/>
+              </a:solidFill>
+              <a:effectLst/>
+              <a:latin typeface="Arial" panose="020B0604020202020204" pitchFamily="34" charset="0"/>
+            </a:endParaRPr>
+          </a:p>
+        </p:txBody>
+      </p:sp>
+    </p:spTree>
+    <p:extLst>
+      <p:ext uri="{BB962C8B-B14F-4D97-AF65-F5344CB8AC3E}">
+        <p14:creationId xmlns:p14="http://schemas.microsoft.com/office/powerpoint/2010/main" val="1228058612"/>
+      </p:ext>
+    </p:extLst>
+  </p:cSld>
+  <p:clrMapOvr>
+    <a:masterClrMapping/>
+  </p:clrMapOvr>
+</p:sld>
+</file>
+
+<file path=ppt/slides/slide6.xml><?xml version="1.0" encoding="utf-8"?>
+<p:sld xmlns:a="http://schemas.openxmlformats.org/drawingml/2006/main" xmlns:r="http://schemas.openxmlformats.org/officeDocument/2006/relationships" xmlns:p="http://schemas.openxmlformats.org/presentationml/2006/main">
+  <p:cSld>
+    <p:spTree>
+      <p:nvGrpSpPr>
+        <p:cNvPr id="1" name="">
+          <a:extLst>
+            <a:ext uri="{FF2B5EF4-FFF2-40B4-BE49-F238E27FC236}">
+              <a16:creationId xmlns:a16="http://schemas.microsoft.com/office/drawing/2014/main" id="{22D317ED-2D72-CD4B-6AB4-03839A71376F}"/>
+            </a:ext>
+          </a:extLst>
+        </p:cNvPr>
+        <p:cNvGrpSpPr/>
+        <p:nvPr/>
+      </p:nvGrpSpPr>
+      <p:grpSpPr>
+        <a:xfrm>
+          <a:off x="0" y="0"/>
+          <a:ext cx="0" cy="0"/>
+          <a:chOff x="0" y="0"/>
+          <a:chExt cx="0" cy="0"/>
+        </a:xfrm>
+      </p:grpSpPr>
+      <p:sp>
+        <p:nvSpPr>
+          <p:cNvPr id="3" name="TextBox 2">
+            <a:extLst>
+              <a:ext uri="{FF2B5EF4-FFF2-40B4-BE49-F238E27FC236}">
+                <a16:creationId xmlns:a16="http://schemas.microsoft.com/office/drawing/2014/main" id="{278C1872-794B-BC76-75C6-9C0592CE01AE}"/>
+              </a:ext>
+            </a:extLst>
+          </p:cNvPr>
+          <p:cNvSpPr txBox="1"/>
+          <p:nvPr/>
+        </p:nvSpPr>
+        <p:spPr>
+          <a:xfrm>
+            <a:off x="217714" y="255046"/>
+            <a:ext cx="11756571" cy="655436"/>
+          </a:xfrm>
+          <a:prstGeom prst="rect">
+            <a:avLst/>
+          </a:prstGeom>
+          <a:noFill/>
+        </p:spPr>
+        <p:txBody>
+          <a:bodyPr wrap="square">
+            <a:spAutoFit/>
+          </a:bodyPr>
+          <a:lstStyle/>
+          <a:p>
+            <a:pPr>
+              <a:lnSpc>
+                <a:spcPct val="150000"/>
+              </a:lnSpc>
+              <a:buNone/>
+            </a:pPr>
+            <a:r>
+              <a:rPr lang="en-US" altLang="en-US" sz="1300">
+                <a:latin typeface="Arial" panose="020B0604020202020204" pitchFamily="34" charset="0"/>
+              </a:rPr>
+              <a:t>Art</a:t>
+            </a:r>
+            <a:r>
+              <a:rPr lang="az-Latn-AZ" altLang="en-US" sz="1300">
+                <a:latin typeface="Arial" panose="020B0604020202020204" pitchFamily="34" charset="0"/>
+              </a:rPr>
+              <a:t>ıq </a:t>
+            </a:r>
+            <a:r>
+              <a:rPr lang="az-Latn-AZ" altLang="en-US" sz="1300" b="1">
+                <a:latin typeface="Arial" panose="020B0604020202020204" pitchFamily="34" charset="0"/>
+              </a:rPr>
+              <a:t>edit.blade.php </a:t>
+            </a:r>
+            <a:r>
+              <a:rPr lang="az-Latn-AZ" altLang="en-US" sz="1300">
+                <a:latin typeface="Arial" panose="020B0604020202020204" pitchFamily="34" charset="0"/>
+              </a:rPr>
+              <a:t>faylını redaktə edə bilərik. Bunun üçün ilk öncə </a:t>
+            </a:r>
+            <a:r>
+              <a:rPr lang="az-Latn-AZ" altLang="en-US" sz="1300" b="1">
+                <a:latin typeface="Arial" panose="020B0604020202020204" pitchFamily="34" charset="0"/>
+              </a:rPr>
+              <a:t>PostController</a:t>
+            </a:r>
+            <a:r>
+              <a:rPr lang="az-Latn-AZ" altLang="en-US" sz="1300">
+                <a:latin typeface="Arial" panose="020B0604020202020204" pitchFamily="34" charset="0"/>
+              </a:rPr>
+              <a:t> -in </a:t>
+            </a:r>
+            <a:r>
+              <a:rPr lang="az-Latn-AZ" altLang="en-US" sz="1300" b="1">
+                <a:latin typeface="Arial" panose="020B0604020202020204" pitchFamily="34" charset="0"/>
+              </a:rPr>
+              <a:t>edit() </a:t>
+            </a:r>
+            <a:r>
+              <a:rPr lang="az-Latn-AZ" altLang="en-US" sz="1300">
+                <a:latin typeface="Arial" panose="020B0604020202020204" pitchFamily="34" charset="0"/>
+              </a:rPr>
+              <a:t>funksiyasına </a:t>
+            </a:r>
+            <a:r>
+              <a:rPr lang="az-Latn-AZ" altLang="en-US" sz="1300" b="1">
+                <a:latin typeface="Arial" panose="020B0604020202020204" pitchFamily="34" charset="0"/>
+              </a:rPr>
+              <a:t>Category</a:t>
+            </a:r>
+            <a:r>
+              <a:rPr lang="az-Latn-AZ" altLang="en-US" sz="1300">
+                <a:latin typeface="Arial" panose="020B0604020202020204" pitchFamily="34" charset="0"/>
+              </a:rPr>
+              <a:t> modelinidə çağıraq ki, </a:t>
+            </a:r>
+            <a:r>
+              <a:rPr lang="az-Latn-AZ" altLang="en-US" sz="1300" b="1">
+                <a:latin typeface="Arial" panose="020B0604020202020204" pitchFamily="34" charset="0"/>
+              </a:rPr>
+              <a:t>edit</a:t>
+            </a:r>
+            <a:r>
+              <a:rPr lang="az-Latn-AZ" altLang="en-US" sz="1300">
+                <a:latin typeface="Arial" panose="020B0604020202020204" pitchFamily="34" charset="0"/>
+              </a:rPr>
+              <a:t> səhifəsində uyğun kateqoriyaları göstərə bilək. </a:t>
+            </a:r>
+            <a:endParaRPr kumimoji="0" lang="en-US" altLang="en-US" sz="1300" b="0" i="0" u="none" strike="noStrike" cap="none" normalizeH="0" baseline="0">
+              <a:ln>
+                <a:noFill/>
+              </a:ln>
+              <a:solidFill>
+                <a:schemeClr val="tx1"/>
+              </a:solidFill>
+              <a:effectLst/>
+              <a:latin typeface="Arial" panose="020B0604020202020204" pitchFamily="34" charset="0"/>
+            </a:endParaRPr>
+          </a:p>
+        </p:txBody>
+      </p:sp>
+      <p:pic>
+        <p:nvPicPr>
+          <p:cNvPr id="4" name="Picture 3">
+            <a:extLst>
+              <a:ext uri="{FF2B5EF4-FFF2-40B4-BE49-F238E27FC236}">
+                <a16:creationId xmlns:a16="http://schemas.microsoft.com/office/drawing/2014/main" id="{EF711796-1BD3-FF33-2D17-4476718702D1}"/>
+              </a:ext>
+            </a:extLst>
+          </p:cNvPr>
+          <p:cNvPicPr>
+            <a:picLocks noChangeAspect="1"/>
+          </p:cNvPicPr>
+          <p:nvPr/>
+        </p:nvPicPr>
+        <p:blipFill>
+          <a:blip r:embed="rId2"/>
+          <a:stretch>
+            <a:fillRect/>
+          </a:stretch>
+        </p:blipFill>
+        <p:spPr>
+          <a:xfrm>
+            <a:off x="7836099" y="1782494"/>
+            <a:ext cx="4355901" cy="5075505"/>
+          </a:xfrm>
+          <a:prstGeom prst="rect">
+            <a:avLst/>
+          </a:prstGeom>
+        </p:spPr>
+      </p:pic>
+      <p:pic>
+        <p:nvPicPr>
+          <p:cNvPr id="8" name="Picture 7">
+            <a:extLst>
+              <a:ext uri="{FF2B5EF4-FFF2-40B4-BE49-F238E27FC236}">
+                <a16:creationId xmlns:a16="http://schemas.microsoft.com/office/drawing/2014/main" id="{EBD4D831-187C-DDE3-DEB8-2E976CB3B2FB}"/>
+              </a:ext>
+            </a:extLst>
+          </p:cNvPr>
+          <p:cNvPicPr>
+            <a:picLocks noChangeAspect="1"/>
+          </p:cNvPicPr>
+          <p:nvPr/>
+        </p:nvPicPr>
+        <p:blipFill>
+          <a:blip r:embed="rId3"/>
+          <a:stretch>
+            <a:fillRect/>
+          </a:stretch>
+        </p:blipFill>
+        <p:spPr>
+          <a:xfrm>
+            <a:off x="1" y="1782494"/>
+            <a:ext cx="7505700" cy="5075505"/>
+          </a:xfrm>
+          <a:prstGeom prst="rect">
+            <a:avLst/>
+          </a:prstGeom>
+        </p:spPr>
+      </p:pic>
+    </p:spTree>
+    <p:extLst>
+      <p:ext uri="{BB962C8B-B14F-4D97-AF65-F5344CB8AC3E}">
+        <p14:creationId xmlns:p14="http://schemas.microsoft.com/office/powerpoint/2010/main" val="767230593"/>
+      </p:ext>
+    </p:extLst>
+  </p:cSld>
+  <p:clrMapOvr>
+    <a:masterClrMapping/>
+  </p:clrMapOvr>
+</p:sld>
+</file>
+
+<file path=ppt/slides/slide7.xml><?xml version="1.0" encoding="utf-8"?>
+<p:sld xmlns:a="http://schemas.openxmlformats.org/drawingml/2006/main" xmlns:r="http://schemas.openxmlformats.org/officeDocument/2006/relationships" xmlns:p="http://schemas.openxmlformats.org/presentationml/2006/main">
+  <p:cSld>
+    <p:spTree>
+      <p:nvGrpSpPr>
+        <p:cNvPr id="1" name="">
+          <a:extLst>
+            <a:ext uri="{FF2B5EF4-FFF2-40B4-BE49-F238E27FC236}">
+              <a16:creationId xmlns:a16="http://schemas.microsoft.com/office/drawing/2014/main" id="{297C1ED9-4B8B-7795-E83E-CB2C0C8A034D}"/>
+            </a:ext>
+          </a:extLst>
+        </p:cNvPr>
+        <p:cNvGrpSpPr/>
+        <p:nvPr/>
+      </p:nvGrpSpPr>
+      <p:grpSpPr>
+        <a:xfrm>
+          <a:off x="0" y="0"/>
+          <a:ext cx="0" cy="0"/>
+          <a:chOff x="0" y="0"/>
+          <a:chExt cx="0" cy="0"/>
+        </a:xfrm>
+      </p:grpSpPr>
+      <p:sp>
+        <p:nvSpPr>
+          <p:cNvPr id="3" name="TextBox 2">
+            <a:extLst>
+              <a:ext uri="{FF2B5EF4-FFF2-40B4-BE49-F238E27FC236}">
+                <a16:creationId xmlns:a16="http://schemas.microsoft.com/office/drawing/2014/main" id="{95F5B9CE-858A-C061-C2F9-8E0BA0B619F1}"/>
+              </a:ext>
+            </a:extLst>
+          </p:cNvPr>
+          <p:cNvSpPr txBox="1"/>
+          <p:nvPr/>
+        </p:nvSpPr>
+        <p:spPr>
+          <a:xfrm>
+            <a:off x="217714" y="255046"/>
+            <a:ext cx="11756571" cy="355354"/>
+          </a:xfrm>
+          <a:prstGeom prst="rect">
+            <a:avLst/>
+          </a:prstGeom>
+          <a:noFill/>
+        </p:spPr>
+        <p:txBody>
+          <a:bodyPr wrap="square">
+            <a:spAutoFit/>
+          </a:bodyPr>
+          <a:lstStyle/>
+          <a:p>
+            <a:pPr>
+              <a:lnSpc>
+                <a:spcPct val="150000"/>
+              </a:lnSpc>
+              <a:buNone/>
+            </a:pPr>
+            <a:r>
+              <a:rPr kumimoji="0" lang="en-US" altLang="en-US" sz="1300" b="0" i="0" u="none" strike="noStrike" cap="none" normalizeH="0" baseline="0">
+                <a:ln>
+                  <a:noFill/>
+                </a:ln>
+                <a:solidFill>
+                  <a:schemeClr val="tx1"/>
+                </a:solidFill>
+                <a:effectLst/>
+                <a:latin typeface="Arial" panose="020B0604020202020204" pitchFamily="34" charset="0"/>
+              </a:rPr>
+              <a:t>.</a:t>
+            </a:r>
+          </a:p>
+        </p:txBody>
+      </p:sp>
+      <p:pic>
+        <p:nvPicPr>
+          <p:cNvPr id="4" name="Picture 3">
+            <a:extLst>
+              <a:ext uri="{FF2B5EF4-FFF2-40B4-BE49-F238E27FC236}">
+                <a16:creationId xmlns:a16="http://schemas.microsoft.com/office/drawing/2014/main" id="{2C1FBF61-43B0-44C1-BA45-BF3383ADC685}"/>
+              </a:ext>
+            </a:extLst>
+          </p:cNvPr>
+          <p:cNvPicPr>
+            <a:picLocks noChangeAspect="1"/>
+          </p:cNvPicPr>
+          <p:nvPr/>
+        </p:nvPicPr>
+        <p:blipFill>
+          <a:blip r:embed="rId2"/>
+          <a:stretch>
+            <a:fillRect/>
+          </a:stretch>
+        </p:blipFill>
+        <p:spPr>
+          <a:xfrm>
+            <a:off x="106895" y="95250"/>
+            <a:ext cx="5379505" cy="3429000"/>
+          </a:xfrm>
+          <a:prstGeom prst="rect">
+            <a:avLst/>
+          </a:prstGeom>
+          <a:ln w="38100" cap="sq">
+            <a:solidFill>
+              <a:srgbClr val="000000"/>
+            </a:solidFill>
+            <a:prstDash val="solid"/>
+            <a:miter lim="800000"/>
+          </a:ln>
+          <a:effectLst>
+            <a:outerShdw blurRad="50800" dist="38100" dir="2700000" algn="tl" rotWithShape="0">
+              <a:srgbClr val="000000">
+                <a:alpha val="43000"/>
+              </a:srgbClr>
+            </a:outerShdw>
+          </a:effectLst>
+        </p:spPr>
+      </p:pic>
+      <p:pic>
+        <p:nvPicPr>
+          <p:cNvPr id="6" name="Picture 5">
+            <a:extLst>
+              <a:ext uri="{FF2B5EF4-FFF2-40B4-BE49-F238E27FC236}">
+                <a16:creationId xmlns:a16="http://schemas.microsoft.com/office/drawing/2014/main" id="{365C7DE8-0018-8824-60A2-BF26ED757138}"/>
+              </a:ext>
+            </a:extLst>
+          </p:cNvPr>
+          <p:cNvPicPr>
+            <a:picLocks noChangeAspect="1"/>
+          </p:cNvPicPr>
+          <p:nvPr/>
+        </p:nvPicPr>
+        <p:blipFill>
+          <a:blip r:embed="rId3"/>
+          <a:stretch>
+            <a:fillRect/>
+          </a:stretch>
+        </p:blipFill>
+        <p:spPr>
+          <a:xfrm>
+            <a:off x="5958262" y="3032166"/>
+            <a:ext cx="6126843" cy="3730584"/>
+          </a:xfrm>
+          <a:prstGeom prst="rect">
+            <a:avLst/>
+          </a:prstGeom>
+          <a:ln w="38100" cap="sq">
+            <a:solidFill>
+              <a:srgbClr val="000000"/>
+            </a:solidFill>
+            <a:prstDash val="solid"/>
+            <a:miter lim="800000"/>
+          </a:ln>
+          <a:effectLst>
+            <a:outerShdw blurRad="50800" dist="38100" dir="2700000" algn="tl" rotWithShape="0">
+              <a:srgbClr val="000000">
+                <a:alpha val="43000"/>
+              </a:srgbClr>
+            </a:outerShdw>
+          </a:effectLst>
+        </p:spPr>
+      </p:pic>
+    </p:spTree>
+    <p:extLst>
+      <p:ext uri="{BB962C8B-B14F-4D97-AF65-F5344CB8AC3E}">
+        <p14:creationId xmlns:p14="http://schemas.microsoft.com/office/powerpoint/2010/main" val="1509723564"/>
+      </p:ext>
+    </p:extLst>
+  </p:cSld>
+  <p:clrMapOvr>
+    <a:masterClrMapping/>
+  </p:clrMapOvr>
+</p:sld>
+</file>
+
+<file path=ppt/slides/slide8.xml><?xml version="1.0" encoding="utf-8"?>
 <p:sld xmlns:a="http://schemas.openxmlformats.org/drawingml/2006/main" xmlns:r="http://schemas.openxmlformats.org/officeDocument/2006/relationships" xmlns:p="http://schemas.openxmlformats.org/presentationml/2006/main">
   <p:cSld>
     <p:spTree>
@@ -3647,6 +7171,92 @@
     <p:extLst>
       <p:ext uri="{BB962C8B-B14F-4D97-AF65-F5344CB8AC3E}">
         <p14:creationId xmlns:p14="http://schemas.microsoft.com/office/powerpoint/2010/main" val="3095838342"/>
+      </p:ext>
+    </p:extLst>
+  </p:cSld>
+  <p:clrMapOvr>
+    <a:masterClrMapping/>
+  </p:clrMapOvr>
+</p:sld>
+</file>
+
+<file path=ppt/slides/slide9.xml><?xml version="1.0" encoding="utf-8"?>
+<p:sld xmlns:a="http://schemas.openxmlformats.org/drawingml/2006/main" xmlns:r="http://schemas.openxmlformats.org/officeDocument/2006/relationships" xmlns:p="http://schemas.openxmlformats.org/presentationml/2006/main">
+  <p:cSld>
+    <p:spTree>
+      <p:nvGrpSpPr>
+        <p:cNvPr id="1" name="">
+          <a:extLst>
+            <a:ext uri="{FF2B5EF4-FFF2-40B4-BE49-F238E27FC236}">
+              <a16:creationId xmlns:a16="http://schemas.microsoft.com/office/drawing/2014/main" id="{0BC6020F-2D13-95AB-0B01-CEAA87B88536}"/>
+            </a:ext>
+          </a:extLst>
+        </p:cNvPr>
+        <p:cNvGrpSpPr/>
+        <p:nvPr/>
+      </p:nvGrpSpPr>
+      <p:grpSpPr>
+        <a:xfrm>
+          <a:off x="0" y="0"/>
+          <a:ext cx="0" cy="0"/>
+          <a:chOff x="0" y="0"/>
+          <a:chExt cx="0" cy="0"/>
+        </a:xfrm>
+      </p:grpSpPr>
+      <p:sp>
+        <p:nvSpPr>
+          <p:cNvPr id="3" name="TextBox 2">
+            <a:extLst>
+              <a:ext uri="{FF2B5EF4-FFF2-40B4-BE49-F238E27FC236}">
+                <a16:creationId xmlns:a16="http://schemas.microsoft.com/office/drawing/2014/main" id="{083B3DFD-5A24-FF32-0DFC-593E90B7C6D3}"/>
+              </a:ext>
+            </a:extLst>
+          </p:cNvPr>
+          <p:cNvSpPr txBox="1"/>
+          <p:nvPr/>
+        </p:nvSpPr>
+        <p:spPr>
+          <a:xfrm>
+            <a:off x="217714" y="255046"/>
+            <a:ext cx="11756571" cy="355354"/>
+          </a:xfrm>
+          <a:prstGeom prst="rect">
+            <a:avLst/>
+          </a:prstGeom>
+          <a:noFill/>
+        </p:spPr>
+        <p:txBody>
+          <a:bodyPr wrap="square">
+            <a:spAutoFit/>
+          </a:bodyPr>
+          <a:lstStyle/>
+          <a:p>
+            <a:pPr>
+              <a:lnSpc>
+                <a:spcPct val="150000"/>
+              </a:lnSpc>
+              <a:buNone/>
+            </a:pPr>
+            <a:r>
+              <a:rPr kumimoji="0" lang="en-US" altLang="en-US" sz="1300" b="0" i="0" u="none" strike="noStrike" cap="none" normalizeH="0" baseline="0">
+                <a:ln>
+                  <a:noFill/>
+                </a:ln>
+                <a:solidFill>
+                  <a:schemeClr val="tx1"/>
+                </a:solidFill>
+                <a:effectLst/>
+                <a:latin typeface="Arial" panose="020B0604020202020204" pitchFamily="34" charset="0"/>
+              </a:rPr>
+              <a:t>.</a:t>
+            </a:r>
+          </a:p>
+        </p:txBody>
+      </p:sp>
+    </p:spTree>
+    <p:extLst>
+      <p:ext uri="{BB962C8B-B14F-4D97-AF65-F5344CB8AC3E}">
+        <p14:creationId xmlns:p14="http://schemas.microsoft.com/office/powerpoint/2010/main" val="1292019864"/>
       </p:ext>
     </p:extLst>
   </p:cSld>
